--- a/스크립트언어/숙제4. 정렬 알고리즘.pptx
+++ b/스크립트언어/숙제4. 정렬 알고리즘.pptx
@@ -5,7 +5,7 @@
     <p:sldMasterId id="2147483684" r:id="rId1"/>
   </p:sldMasterIdLst>
   <p:notesMasterIdLst>
-    <p:notesMasterId r:id="rId11"/>
+    <p:notesMasterId r:id="rId15"/>
   </p:notesMasterIdLst>
   <p:sldIdLst>
     <p:sldId id="258" r:id="rId2"/>
@@ -13,10 +13,14 @@
     <p:sldId id="335" r:id="rId4"/>
     <p:sldId id="259" r:id="rId5"/>
     <p:sldId id="336" r:id="rId6"/>
-    <p:sldId id="337" r:id="rId7"/>
-    <p:sldId id="339" r:id="rId8"/>
-    <p:sldId id="341" r:id="rId9"/>
-    <p:sldId id="342" r:id="rId10"/>
+    <p:sldId id="345" r:id="rId7"/>
+    <p:sldId id="337" r:id="rId8"/>
+    <p:sldId id="339" r:id="rId9"/>
+    <p:sldId id="346" r:id="rId10"/>
+    <p:sldId id="341" r:id="rId11"/>
+    <p:sldId id="344" r:id="rId12"/>
+    <p:sldId id="342" r:id="rId13"/>
+    <p:sldId id="343" r:id="rId14"/>
   </p:sldIdLst>
   <p:sldSz cx="9144000" cy="6858000" type="screen4x3"/>
   <p:notesSz cx="6796088" cy="9926638"/>
@@ -276,7 +280,7 @@
               <a:pPr>
                 <a:defRPr/>
               </a:pPr>
-              <a:t>2026-03-01</a:t>
+              <a:t>2026-04-20</a:t>
             </a:fld>
             <a:endParaRPr lang="ko-KR" altLang="en-US"/>
           </a:p>
@@ -1963,7 +1967,7 @@
               <a:pPr>
                 <a:defRPr/>
               </a:pPr>
-              <a:t>6</a:t>
+              <a:t>7</a:t>
             </a:fld>
             <a:endParaRPr lang="ko-KR" altLang="en-US"/>
           </a:p>
@@ -2077,7 +2081,7 @@
               <a:pPr>
                 <a:defRPr/>
               </a:pPr>
-              <a:t>7</a:t>
+              <a:t>8</a:t>
             </a:fld>
             <a:endParaRPr lang="ko-KR" altLang="en-US"/>
           </a:p>
@@ -2191,7 +2195,7 @@
               <a:pPr>
                 <a:defRPr/>
               </a:pPr>
-              <a:t>8</a:t>
+              <a:t>10</a:t>
             </a:fld>
             <a:endParaRPr lang="ko-KR" altLang="en-US"/>
           </a:p>
@@ -2305,7 +2309,7 @@
               <a:pPr>
                 <a:defRPr/>
               </a:pPr>
-              <a:t>9</a:t>
+              <a:t>12</a:t>
             </a:fld>
             <a:endParaRPr lang="ko-KR" altLang="en-US"/>
           </a:p>
@@ -6842,6 +6846,1395 @@
 </p:sld>
 </file>
 
+<file path=ppt/slides/slide10.xml><?xml version="1.0" encoding="utf-8"?>
+<p:sld xmlns:a="http://schemas.openxmlformats.org/drawingml/2006/main" xmlns:r="http://schemas.openxmlformats.org/officeDocument/2006/relationships" xmlns:p="http://schemas.openxmlformats.org/presentationml/2006/main">
+  <p:cSld>
+    <p:spTree>
+      <p:nvGrpSpPr>
+        <p:cNvPr id="1" name="">
+          <a:extLst>
+            <a:ext uri="{FF2B5EF4-FFF2-40B4-BE49-F238E27FC236}">
+              <a16:creationId xmlns:a16="http://schemas.microsoft.com/office/drawing/2014/main" id="{BB2182D6-7C3A-1450-0957-0736228992F8}"/>
+            </a:ext>
+          </a:extLst>
+        </p:cNvPr>
+        <p:cNvGrpSpPr/>
+        <p:nvPr/>
+      </p:nvGrpSpPr>
+      <p:grpSpPr>
+        <a:xfrm>
+          <a:off x="0" y="0"/>
+          <a:ext cx="0" cy="0"/>
+          <a:chOff x="0" y="0"/>
+          <a:chExt cx="0" cy="0"/>
+        </a:xfrm>
+      </p:grpSpPr>
+      <p:sp>
+        <p:nvSpPr>
+          <p:cNvPr id="2" name="제목 1">
+            <a:extLst>
+              <a:ext uri="{FF2B5EF4-FFF2-40B4-BE49-F238E27FC236}">
+                <a16:creationId xmlns:a16="http://schemas.microsoft.com/office/drawing/2014/main" id="{00FC0AAC-B616-D4EC-909C-ECC3F2A8B843}"/>
+              </a:ext>
+            </a:extLst>
+          </p:cNvPr>
+          <p:cNvSpPr>
+            <a:spLocks noGrp="1"/>
+          </p:cNvSpPr>
+          <p:nvPr>
+            <p:ph type="title"/>
+          </p:nvPr>
+        </p:nvSpPr>
+        <p:spPr/>
+        <p:txBody>
+          <a:bodyPr/>
+          <a:lstStyle/>
+          <a:p>
+            <a:r>
+              <a:rPr lang="en-US" altLang="ko-KR" sz="2800" dirty="0"/>
+              <a:t>4. </a:t>
+            </a:r>
+            <a:r>
+              <a:rPr lang="ko-KR" altLang="en-US" sz="2800" dirty="0"/>
+              <a:t>실패율 </a:t>
+            </a:r>
+            <a:r>
+              <a:rPr lang="en-US" altLang="ko-KR" sz="2800" dirty="0"/>
+              <a:t>(Programmers, </a:t>
+            </a:r>
+            <a:r>
+              <a:rPr lang="ko-KR" altLang="en-US" sz="2800" dirty="0"/>
+              <a:t>구현</a:t>
+            </a:r>
+            <a:r>
+              <a:rPr lang="en-US" altLang="ko-KR" sz="2800" dirty="0"/>
+              <a:t>, </a:t>
+            </a:r>
+            <a:r>
+              <a:rPr lang="ko-KR" altLang="en-US" sz="2800" dirty="0"/>
+              <a:t>정렬</a:t>
+            </a:r>
+            <a:r>
+              <a:rPr lang="en-US" altLang="ko-KR" sz="2800" dirty="0"/>
+              <a:t>) </a:t>
+            </a:r>
+            <a:br>
+              <a:rPr lang="en-US" altLang="ko-KR" sz="2800" dirty="0"/>
+            </a:br>
+            <a:r>
+              <a:rPr lang="en-US" altLang="ko-KR" sz="2000" dirty="0"/>
+              <a:t>https://school.programmers.co.kr/learn/courses/30/lessons/42889</a:t>
+            </a:r>
+            <a:endParaRPr lang="ko-KR" altLang="en-US" sz="2000" dirty="0"/>
+          </a:p>
+        </p:txBody>
+      </p:sp>
+      <p:sp>
+        <p:nvSpPr>
+          <p:cNvPr id="5" name="슬라이드 번호 개체 틀 4">
+            <a:extLst>
+              <a:ext uri="{FF2B5EF4-FFF2-40B4-BE49-F238E27FC236}">
+                <a16:creationId xmlns:a16="http://schemas.microsoft.com/office/drawing/2014/main" id="{81099AAD-C6EA-CB4B-F77E-8434C7D5EADC}"/>
+              </a:ext>
+            </a:extLst>
+          </p:cNvPr>
+          <p:cNvSpPr>
+            <a:spLocks noGrp="1"/>
+          </p:cNvSpPr>
+          <p:nvPr>
+            <p:ph type="sldNum" sz="quarter" idx="12"/>
+          </p:nvPr>
+        </p:nvSpPr>
+        <p:spPr/>
+        <p:txBody>
+          <a:bodyPr/>
+          <a:lstStyle/>
+          <a:p>
+            <a:pPr>
+              <a:defRPr/>
+            </a:pPr>
+            <a:fld id="{A268DA64-E15D-4814-A1DA-86D92D550423}" type="slidenum">
+              <a:rPr lang="ko-KR" altLang="en-US" smtClean="0"/>
+              <a:pPr>
+                <a:defRPr/>
+              </a:pPr>
+              <a:t>10</a:t>
+            </a:fld>
+            <a:endParaRPr lang="ko-KR" altLang="en-US"/>
+          </a:p>
+        </p:txBody>
+      </p:sp>
+      <p:sp>
+        <p:nvSpPr>
+          <p:cNvPr id="3" name="내용 개체 틀 2">
+            <a:extLst>
+              <a:ext uri="{FF2B5EF4-FFF2-40B4-BE49-F238E27FC236}">
+                <a16:creationId xmlns:a16="http://schemas.microsoft.com/office/drawing/2014/main" id="{858C86E8-5349-F7B3-AFB6-B10A83FC024F}"/>
+              </a:ext>
+            </a:extLst>
+          </p:cNvPr>
+          <p:cNvSpPr>
+            <a:spLocks noGrp="1"/>
+          </p:cNvSpPr>
+          <p:nvPr>
+            <p:ph idx="1"/>
+          </p:nvPr>
+        </p:nvSpPr>
+        <p:spPr>
+          <a:xfrm>
+            <a:off x="457200" y="1340768"/>
+            <a:ext cx="8229600" cy="4785395"/>
+          </a:xfrm>
+        </p:spPr>
+        <p:txBody>
+          <a:bodyPr/>
+          <a:lstStyle/>
+          <a:p>
+            <a:pPr algn="just"/>
+            <a:r>
+              <a:rPr lang="ko-KR" altLang="en-US" sz="1800" b="0" i="0" dirty="0">
+                <a:effectLst/>
+                <a:latin typeface="Open Sans" panose="020F0502020204030204" pitchFamily="34" charset="0"/>
+              </a:rPr>
+              <a:t>실패율</a:t>
+            </a:r>
+            <a:r>
+              <a:rPr lang="en-US" altLang="ko-KR" sz="1800" dirty="0">
+                <a:latin typeface="Open Sans" panose="020F0502020204030204" pitchFamily="34" charset="0"/>
+              </a:rPr>
+              <a:t> = </a:t>
+            </a:r>
+            <a:r>
+              <a:rPr lang="ko-KR" altLang="en-US" sz="1800" b="0" i="0" dirty="0">
+                <a:effectLst/>
+                <a:latin typeface="Open Sans" panose="020F0502020204030204" pitchFamily="34" charset="0"/>
+              </a:rPr>
+              <a:t>스테이지에 도달했으나 아직 클리어하지 못한 플레이어의 수 </a:t>
+            </a:r>
+            <a:r>
+              <a:rPr lang="en-US" altLang="ko-KR" sz="1800" b="0" i="0" dirty="0">
+                <a:effectLst/>
+                <a:latin typeface="Open Sans" panose="020F0502020204030204" pitchFamily="34" charset="0"/>
+              </a:rPr>
+              <a:t>/ </a:t>
+            </a:r>
+            <a:r>
+              <a:rPr lang="ko-KR" altLang="en-US" sz="1800" b="0" i="0" dirty="0">
+                <a:effectLst/>
+                <a:latin typeface="Open Sans" panose="020F0502020204030204" pitchFamily="34" charset="0"/>
+              </a:rPr>
+              <a:t>스테이지에 도달한 플레이어 수</a:t>
+            </a:r>
+          </a:p>
+          <a:p>
+            <a:pPr algn="just"/>
+            <a:r>
+              <a:rPr lang="ko-KR" altLang="en-US" sz="1800" b="0" i="0" dirty="0">
+                <a:effectLst/>
+                <a:latin typeface="Open Sans" panose="020F0502020204030204" pitchFamily="34" charset="0"/>
+              </a:rPr>
+              <a:t>전체 스테이지의 개수 </a:t>
+            </a:r>
+            <a:r>
+              <a:rPr lang="en-US" altLang="ko-KR" sz="1800" b="0" i="0" dirty="0">
+                <a:effectLst/>
+                <a:latin typeface="Open Sans" panose="020F0502020204030204" pitchFamily="34" charset="0"/>
+              </a:rPr>
+              <a:t>N, </a:t>
+            </a:r>
+            <a:r>
+              <a:rPr lang="ko-KR" altLang="en-US" sz="1800" b="0" i="0" dirty="0">
+                <a:effectLst/>
+                <a:latin typeface="Open Sans" panose="020F0502020204030204" pitchFamily="34" charset="0"/>
+              </a:rPr>
+              <a:t>게임을 이용하는 사용자가 현재 </a:t>
+            </a:r>
+            <a:r>
+              <a:rPr lang="ko-KR" altLang="en-US" sz="1800" b="0" i="0" dirty="0" err="1">
+                <a:effectLst/>
+                <a:latin typeface="Open Sans" panose="020F0502020204030204" pitchFamily="34" charset="0"/>
+              </a:rPr>
+              <a:t>멈춰있는</a:t>
+            </a:r>
+            <a:r>
+              <a:rPr lang="ko-KR" altLang="en-US" sz="1800" b="0" i="0" dirty="0">
+                <a:effectLst/>
+                <a:latin typeface="Open Sans" panose="020F0502020204030204" pitchFamily="34" charset="0"/>
+              </a:rPr>
+              <a:t> 스테이지의 번호가 담긴 배열 </a:t>
+            </a:r>
+            <a:r>
+              <a:rPr lang="en-US" altLang="ko-KR" sz="1800" b="0" i="0" dirty="0">
+                <a:effectLst/>
+                <a:latin typeface="Open Sans" panose="020F0502020204030204" pitchFamily="34" charset="0"/>
+              </a:rPr>
+              <a:t>stages</a:t>
+            </a:r>
+            <a:r>
+              <a:rPr lang="ko-KR" altLang="en-US" sz="1800" b="0" i="0" dirty="0">
+                <a:effectLst/>
+                <a:latin typeface="Open Sans" panose="020F0502020204030204" pitchFamily="34" charset="0"/>
+              </a:rPr>
+              <a:t>가 매개변수로 주어질 때</a:t>
+            </a:r>
+            <a:r>
+              <a:rPr lang="en-US" altLang="ko-KR" sz="1800" b="0" i="0" dirty="0">
+                <a:effectLst/>
+                <a:latin typeface="Open Sans" panose="020F0502020204030204" pitchFamily="34" charset="0"/>
+              </a:rPr>
+              <a:t>, </a:t>
+            </a:r>
+            <a:r>
+              <a:rPr lang="ko-KR" altLang="en-US" sz="1800" b="0" i="0" dirty="0">
+                <a:effectLst/>
+                <a:latin typeface="Open Sans" panose="020F0502020204030204" pitchFamily="34" charset="0"/>
+              </a:rPr>
+              <a:t>실패율이 높은 스테이지부터 내림차순으로 스테이지의 번호가 담겨있는 배열을 </a:t>
+            </a:r>
+            <a:r>
+              <a:rPr lang="en-US" altLang="ko-KR" sz="1800" b="0" i="0" dirty="0">
+                <a:effectLst/>
+                <a:latin typeface="Open Sans" panose="020F0502020204030204" pitchFamily="34" charset="0"/>
+              </a:rPr>
+              <a:t>return </a:t>
+            </a:r>
+            <a:r>
+              <a:rPr lang="ko-KR" altLang="en-US" sz="1800" b="0" i="0" dirty="0">
+                <a:effectLst/>
+                <a:latin typeface="Open Sans" panose="020F0502020204030204" pitchFamily="34" charset="0"/>
+              </a:rPr>
+              <a:t>하도록 </a:t>
+            </a:r>
+            <a:r>
+              <a:rPr lang="en-US" altLang="ko-KR" sz="1800" b="0" i="0" dirty="0">
+                <a:effectLst/>
+                <a:latin typeface="Open Sans" panose="020F0502020204030204" pitchFamily="34" charset="0"/>
+              </a:rPr>
+              <a:t>solution </a:t>
+            </a:r>
+            <a:r>
+              <a:rPr lang="ko-KR" altLang="en-US" sz="1800" b="0" i="0" dirty="0">
+                <a:effectLst/>
+                <a:latin typeface="Open Sans" panose="020F0502020204030204" pitchFamily="34" charset="0"/>
+              </a:rPr>
+              <a:t>함수를 완성하라</a:t>
+            </a:r>
+            <a:r>
+              <a:rPr lang="en-US" altLang="ko-KR" sz="1800" b="0" i="0" dirty="0">
+                <a:effectLst/>
+                <a:latin typeface="Open Sans" panose="020F0502020204030204" pitchFamily="34" charset="0"/>
+              </a:rPr>
+              <a:t>.</a:t>
+            </a:r>
+          </a:p>
+          <a:p>
+            <a:pPr algn="just"/>
+            <a:r>
+              <a:rPr lang="ko-KR" altLang="en-US" sz="1800" b="0" i="0" dirty="0">
+                <a:effectLst/>
+                <a:latin typeface="Open Sans" panose="020F0502020204030204" pitchFamily="34" charset="0"/>
+              </a:rPr>
+              <a:t>실패율이 같다면 작은 번호의 스테이지가 먼저 오도록 한다</a:t>
+            </a:r>
+            <a:r>
+              <a:rPr lang="en-US" altLang="ko-KR" sz="1800" b="0" i="0" dirty="0">
+                <a:effectLst/>
+                <a:latin typeface="Open Sans" panose="020F0502020204030204" pitchFamily="34" charset="0"/>
+              </a:rPr>
+              <a:t>.</a:t>
+            </a:r>
+          </a:p>
+          <a:p>
+            <a:pPr algn="just"/>
+            <a:r>
+              <a:rPr lang="ko-KR" altLang="en-US" sz="1800" b="0" i="0" dirty="0">
+                <a:effectLst/>
+                <a:latin typeface="Open Sans" panose="020F0502020204030204" pitchFamily="34" charset="0"/>
+              </a:rPr>
+              <a:t>스테이지에 도달한 유저가 없는 경우 해당 스테이지의 실패율은 </a:t>
+            </a:r>
+            <a:r>
+              <a:rPr lang="en-US" altLang="ko-KR" sz="1800" b="0" i="0" dirty="0">
+                <a:effectLst/>
+                <a:latin typeface="Open Sans" panose="020F0502020204030204" pitchFamily="34" charset="0"/>
+              </a:rPr>
+              <a:t>0.</a:t>
+            </a:r>
+          </a:p>
+          <a:p>
+            <a:pPr algn="just"/>
+            <a:endParaRPr lang="en-US" altLang="ko-KR" sz="1800" b="0" i="0" dirty="0">
+              <a:effectLst/>
+              <a:latin typeface="Open Sans" panose="020F0502020204030204" pitchFamily="34" charset="0"/>
+            </a:endParaRPr>
+          </a:p>
+          <a:p>
+            <a:pPr algn="just"/>
+            <a:endParaRPr lang="ko-KR" altLang="en-US" sz="1800" dirty="0"/>
+          </a:p>
+        </p:txBody>
+      </p:sp>
+      <p:pic>
+        <p:nvPicPr>
+          <p:cNvPr id="9" name="그림 8">
+            <a:extLst>
+              <a:ext uri="{FF2B5EF4-FFF2-40B4-BE49-F238E27FC236}">
+                <a16:creationId xmlns:a16="http://schemas.microsoft.com/office/drawing/2014/main" id="{79D5A20B-B007-FA87-3006-68BB93188A38}"/>
+              </a:ext>
+            </a:extLst>
+          </p:cNvPr>
+          <p:cNvPicPr>
+            <a:picLocks noChangeAspect="1"/>
+          </p:cNvPicPr>
+          <p:nvPr/>
+        </p:nvPicPr>
+        <p:blipFill>
+          <a:blip r:embed="rId3"/>
+          <a:stretch>
+            <a:fillRect/>
+          </a:stretch>
+        </p:blipFill>
+        <p:spPr>
+          <a:xfrm>
+            <a:off x="1907704" y="3938841"/>
+            <a:ext cx="4905375" cy="2152650"/>
+          </a:xfrm>
+          <a:prstGeom prst="rect">
+            <a:avLst/>
+          </a:prstGeom>
+        </p:spPr>
+      </p:pic>
+    </p:spTree>
+    <p:extLst>
+      <p:ext uri="{BB962C8B-B14F-4D97-AF65-F5344CB8AC3E}">
+        <p14:creationId xmlns:p14="http://schemas.microsoft.com/office/powerpoint/2010/main" val="2988214561"/>
+      </p:ext>
+    </p:extLst>
+  </p:cSld>
+  <p:clrMapOvr>
+    <a:masterClrMapping/>
+  </p:clrMapOvr>
+</p:sld>
+</file>
+
+<file path=ppt/slides/slide11.xml><?xml version="1.0" encoding="utf-8"?>
+<p:sld xmlns:a="http://schemas.openxmlformats.org/drawingml/2006/main" xmlns:r="http://schemas.openxmlformats.org/officeDocument/2006/relationships" xmlns:p="http://schemas.openxmlformats.org/presentationml/2006/main">
+  <p:cSld>
+    <p:spTree>
+      <p:nvGrpSpPr>
+        <p:cNvPr id="1" name=""/>
+        <p:cNvGrpSpPr/>
+        <p:nvPr/>
+      </p:nvGrpSpPr>
+      <p:grpSpPr>
+        <a:xfrm>
+          <a:off x="0" y="0"/>
+          <a:ext cx="0" cy="0"/>
+          <a:chOff x="0" y="0"/>
+          <a:chExt cx="0" cy="0"/>
+        </a:xfrm>
+      </p:grpSpPr>
+      <p:sp>
+        <p:nvSpPr>
+          <p:cNvPr id="2" name="제목 1">
+            <a:extLst>
+              <a:ext uri="{FF2B5EF4-FFF2-40B4-BE49-F238E27FC236}">
+                <a16:creationId xmlns:a16="http://schemas.microsoft.com/office/drawing/2014/main" id="{48E6B047-9DF1-522D-86C2-CFA1C8454DE4}"/>
+              </a:ext>
+            </a:extLst>
+          </p:cNvPr>
+          <p:cNvSpPr>
+            <a:spLocks noGrp="1"/>
+          </p:cNvSpPr>
+          <p:nvPr>
+            <p:ph type="title"/>
+          </p:nvPr>
+        </p:nvSpPr>
+        <p:spPr/>
+        <p:txBody>
+          <a:bodyPr/>
+          <a:lstStyle/>
+          <a:p>
+            <a:r>
+              <a:rPr lang="en-US" altLang="ko-KR" dirty="0"/>
+              <a:t>4. </a:t>
+            </a:r>
+            <a:r>
+              <a:rPr lang="ko-KR" altLang="en-US" dirty="0"/>
+              <a:t>실패율 </a:t>
+            </a:r>
+            <a:r>
+              <a:rPr lang="en-US" altLang="ko-KR" dirty="0"/>
+              <a:t>(Programmers, </a:t>
+            </a:r>
+            <a:r>
+              <a:rPr lang="ko-KR" altLang="en-US" dirty="0"/>
+              <a:t>구현</a:t>
+            </a:r>
+            <a:r>
+              <a:rPr lang="en-US" altLang="ko-KR" dirty="0"/>
+              <a:t>, </a:t>
+            </a:r>
+            <a:r>
+              <a:rPr lang="ko-KR" altLang="en-US" dirty="0"/>
+              <a:t>정렬</a:t>
+            </a:r>
+            <a:r>
+              <a:rPr lang="en-US" altLang="ko-KR" dirty="0"/>
+              <a:t>) </a:t>
+            </a:r>
+            <a:endParaRPr lang="ko-KR" altLang="en-US" dirty="0"/>
+          </a:p>
+        </p:txBody>
+      </p:sp>
+      <p:pic>
+        <p:nvPicPr>
+          <p:cNvPr id="7" name="내용 개체 틀 6">
+            <a:extLst>
+              <a:ext uri="{FF2B5EF4-FFF2-40B4-BE49-F238E27FC236}">
+                <a16:creationId xmlns:a16="http://schemas.microsoft.com/office/drawing/2014/main" id="{CF2402D3-96A3-1A8C-2A52-F1EC9CD15D78}"/>
+              </a:ext>
+            </a:extLst>
+          </p:cNvPr>
+          <p:cNvPicPr>
+            <a:picLocks noGrp="1" noChangeAspect="1"/>
+          </p:cNvPicPr>
+          <p:nvPr>
+            <p:ph idx="1"/>
+          </p:nvPr>
+        </p:nvPicPr>
+        <p:blipFill>
+          <a:blip r:embed="rId2"/>
+          <a:stretch>
+            <a:fillRect/>
+          </a:stretch>
+        </p:blipFill>
+        <p:spPr bwMode="auto">
+          <a:xfrm>
+            <a:off x="826902" y="1377374"/>
+            <a:ext cx="2353222" cy="1368152"/>
+          </a:xfrm>
+          <a:prstGeom prst="rect">
+            <a:avLst/>
+          </a:prstGeom>
+          <a:noFill/>
+          <a:ln>
+            <a:noFill/>
+          </a:ln>
+          <a:extLst>
+            <a:ext uri="{909E8E84-426E-40DD-AFC4-6F175D3DCCD1}">
+              <a14:hiddenFill xmlns:a14="http://schemas.microsoft.com/office/drawing/2010/main">
+                <a:solidFill>
+                  <a:srgbClr val="FFFFFF"/>
+                </a:solidFill>
+              </a14:hiddenFill>
+            </a:ext>
+            <a:ext uri="{91240B29-F687-4F45-9708-019B960494DF}">
+              <a14:hiddenLine xmlns:a14="http://schemas.microsoft.com/office/drawing/2010/main" w="9525">
+                <a:solidFill>
+                  <a:srgbClr val="000000"/>
+                </a:solidFill>
+                <a:miter lim="800000"/>
+                <a:headEnd/>
+                <a:tailEnd/>
+              </a14:hiddenLine>
+            </a:ext>
+          </a:extLst>
+        </p:spPr>
+      </p:pic>
+      <p:sp>
+        <p:nvSpPr>
+          <p:cNvPr id="4" name="날짜 개체 틀 3">
+            <a:extLst>
+              <a:ext uri="{FF2B5EF4-FFF2-40B4-BE49-F238E27FC236}">
+                <a16:creationId xmlns:a16="http://schemas.microsoft.com/office/drawing/2014/main" id="{56E2297D-D44E-C67D-E027-9E3C6C78FAE5}"/>
+              </a:ext>
+            </a:extLst>
+          </p:cNvPr>
+          <p:cNvSpPr>
+            <a:spLocks noGrp="1"/>
+          </p:cNvSpPr>
+          <p:nvPr>
+            <p:ph type="dt" sz="half" idx="10"/>
+          </p:nvPr>
+        </p:nvSpPr>
+        <p:spPr/>
+        <p:txBody>
+          <a:bodyPr/>
+          <a:lstStyle/>
+          <a:p>
+            <a:pPr>
+              <a:defRPr/>
+            </a:pPr>
+            <a:r>
+              <a:rPr lang="en-US" altLang="ko-KR"/>
+              <a:t>2008</a:t>
+            </a:r>
+            <a:r>
+              <a:rPr lang="ko-KR" altLang="en-US"/>
+              <a:t>년</a:t>
+            </a:r>
+            <a:r>
+              <a:rPr lang="en-US" altLang="ko-KR"/>
+              <a:t>2</a:t>
+            </a:r>
+            <a:r>
+              <a:rPr lang="ko-KR" altLang="en-US"/>
+              <a:t>학기 </a:t>
+            </a:r>
+            <a:r>
+              <a:rPr lang="en-US" altLang="ko-KR"/>
+              <a:t>3D</a:t>
+            </a:r>
+            <a:r>
+              <a:rPr lang="ko-KR" altLang="en-US"/>
+              <a:t>게임프로그래밍</a:t>
+            </a:r>
+            <a:r>
+              <a:rPr lang="en-US" altLang="ko-KR"/>
+              <a:t>II </a:t>
+            </a:r>
+            <a:r>
+              <a:rPr lang="ko-KR" altLang="en-US"/>
+              <a:t>담당교수</a:t>
+            </a:r>
+            <a:r>
+              <a:rPr lang="en-US" altLang="ko-KR"/>
+              <a:t>:</a:t>
+            </a:r>
+            <a:r>
+              <a:rPr lang="ko-KR" altLang="en-US"/>
+              <a:t>김영식</a:t>
+            </a:r>
+          </a:p>
+        </p:txBody>
+      </p:sp>
+      <p:sp>
+        <p:nvSpPr>
+          <p:cNvPr id="5" name="슬라이드 번호 개체 틀 4">
+            <a:extLst>
+              <a:ext uri="{FF2B5EF4-FFF2-40B4-BE49-F238E27FC236}">
+                <a16:creationId xmlns:a16="http://schemas.microsoft.com/office/drawing/2014/main" id="{E755E7CE-58DA-DBAD-7214-87E4FAD1843A}"/>
+              </a:ext>
+            </a:extLst>
+          </p:cNvPr>
+          <p:cNvSpPr>
+            <a:spLocks noGrp="1"/>
+          </p:cNvSpPr>
+          <p:nvPr>
+            <p:ph type="sldNum" sz="quarter" idx="12"/>
+          </p:nvPr>
+        </p:nvSpPr>
+        <p:spPr/>
+        <p:txBody>
+          <a:bodyPr/>
+          <a:lstStyle/>
+          <a:p>
+            <a:pPr>
+              <a:defRPr/>
+            </a:pPr>
+            <a:fld id="{A268DA64-E15D-4814-A1DA-86D92D550423}" type="slidenum">
+              <a:rPr lang="ko-KR" altLang="en-US" smtClean="0"/>
+              <a:pPr>
+                <a:defRPr/>
+              </a:pPr>
+              <a:t>11</a:t>
+            </a:fld>
+            <a:endParaRPr lang="ko-KR" altLang="en-US"/>
+          </a:p>
+        </p:txBody>
+      </p:sp>
+      <p:pic>
+        <p:nvPicPr>
+          <p:cNvPr id="9" name="그림 8">
+            <a:extLst>
+              <a:ext uri="{FF2B5EF4-FFF2-40B4-BE49-F238E27FC236}">
+                <a16:creationId xmlns:a16="http://schemas.microsoft.com/office/drawing/2014/main" id="{7301732F-18F3-C05C-EDF3-674BB81B2DED}"/>
+              </a:ext>
+            </a:extLst>
+          </p:cNvPr>
+          <p:cNvPicPr>
+            <a:picLocks noChangeAspect="1"/>
+          </p:cNvPicPr>
+          <p:nvPr/>
+        </p:nvPicPr>
+        <p:blipFill>
+          <a:blip r:embed="rId3"/>
+          <a:stretch>
+            <a:fillRect/>
+          </a:stretch>
+        </p:blipFill>
+        <p:spPr>
+          <a:xfrm>
+            <a:off x="575930" y="2782131"/>
+            <a:ext cx="3115340" cy="3501008"/>
+          </a:xfrm>
+          <a:prstGeom prst="rect">
+            <a:avLst/>
+          </a:prstGeom>
+        </p:spPr>
+      </p:pic>
+      <p:pic>
+        <p:nvPicPr>
+          <p:cNvPr id="11" name="그림 10">
+            <a:extLst>
+              <a:ext uri="{FF2B5EF4-FFF2-40B4-BE49-F238E27FC236}">
+                <a16:creationId xmlns:a16="http://schemas.microsoft.com/office/drawing/2014/main" id="{208346D7-9D0B-16C4-C9DE-67534EB72678}"/>
+              </a:ext>
+            </a:extLst>
+          </p:cNvPr>
+          <p:cNvPicPr>
+            <a:picLocks noChangeAspect="1"/>
+          </p:cNvPicPr>
+          <p:nvPr/>
+        </p:nvPicPr>
+        <p:blipFill>
+          <a:blip r:embed="rId4"/>
+          <a:stretch>
+            <a:fillRect/>
+          </a:stretch>
+        </p:blipFill>
+        <p:spPr>
+          <a:xfrm>
+            <a:off x="4750428" y="1063059"/>
+            <a:ext cx="2987084" cy="5373216"/>
+          </a:xfrm>
+          <a:prstGeom prst="rect">
+            <a:avLst/>
+          </a:prstGeom>
+        </p:spPr>
+      </p:pic>
+    </p:spTree>
+    <p:extLst>
+      <p:ext uri="{BB962C8B-B14F-4D97-AF65-F5344CB8AC3E}">
+        <p14:creationId xmlns:p14="http://schemas.microsoft.com/office/powerpoint/2010/main" val="1460549126"/>
+      </p:ext>
+    </p:extLst>
+  </p:cSld>
+  <p:clrMapOvr>
+    <a:masterClrMapping/>
+  </p:clrMapOvr>
+</p:sld>
+</file>
+
+<file path=ppt/slides/slide12.xml><?xml version="1.0" encoding="utf-8"?>
+<p:sld xmlns:a="http://schemas.openxmlformats.org/drawingml/2006/main" xmlns:r="http://schemas.openxmlformats.org/officeDocument/2006/relationships" xmlns:p="http://schemas.openxmlformats.org/presentationml/2006/main">
+  <p:cSld>
+    <p:spTree>
+      <p:nvGrpSpPr>
+        <p:cNvPr id="1" name="">
+          <a:extLst>
+            <a:ext uri="{FF2B5EF4-FFF2-40B4-BE49-F238E27FC236}">
+              <a16:creationId xmlns:a16="http://schemas.microsoft.com/office/drawing/2014/main" id="{E6F2C708-8D69-B68B-A8D2-413FA3ED7192}"/>
+            </a:ext>
+          </a:extLst>
+        </p:cNvPr>
+        <p:cNvGrpSpPr/>
+        <p:nvPr/>
+      </p:nvGrpSpPr>
+      <p:grpSpPr>
+        <a:xfrm>
+          <a:off x="0" y="0"/>
+          <a:ext cx="0" cy="0"/>
+          <a:chOff x="0" y="0"/>
+          <a:chExt cx="0" cy="0"/>
+        </a:xfrm>
+      </p:grpSpPr>
+      <p:sp>
+        <p:nvSpPr>
+          <p:cNvPr id="2" name="제목 1">
+            <a:extLst>
+              <a:ext uri="{FF2B5EF4-FFF2-40B4-BE49-F238E27FC236}">
+                <a16:creationId xmlns:a16="http://schemas.microsoft.com/office/drawing/2014/main" id="{CE06BCCD-376D-CD69-322E-655C046A9A4A}"/>
+              </a:ext>
+            </a:extLst>
+          </p:cNvPr>
+          <p:cNvSpPr>
+            <a:spLocks noGrp="1"/>
+          </p:cNvSpPr>
+          <p:nvPr>
+            <p:ph type="title"/>
+          </p:nvPr>
+        </p:nvSpPr>
+        <p:spPr>
+          <a:xfrm>
+            <a:off x="107504" y="274638"/>
+            <a:ext cx="8856984" cy="868346"/>
+          </a:xfrm>
+        </p:spPr>
+        <p:txBody>
+          <a:bodyPr/>
+          <a:lstStyle/>
+          <a:p>
+            <a:r>
+              <a:rPr lang="en-US" altLang="ko-KR" sz="3200" dirty="0"/>
+              <a:t>5. </a:t>
+            </a:r>
+            <a:r>
+              <a:rPr lang="ko-KR" altLang="en-US" sz="3200" dirty="0"/>
+              <a:t>소가 길을 건너간 이유 </a:t>
+            </a:r>
+            <a:r>
+              <a:rPr lang="en-US" altLang="ko-KR" sz="3200" dirty="0"/>
+              <a:t>3(</a:t>
+            </a:r>
+            <a:r>
+              <a:rPr lang="ko-KR" altLang="en-US" sz="3200" dirty="0"/>
+              <a:t>백준</a:t>
+            </a:r>
+            <a:r>
+              <a:rPr lang="en-US" altLang="ko-KR" sz="3200" dirty="0"/>
+              <a:t>, </a:t>
+            </a:r>
+            <a:r>
+              <a:rPr lang="ko-KR" altLang="en-US" sz="3200" dirty="0"/>
+              <a:t>정렬</a:t>
+            </a:r>
+            <a:r>
+              <a:rPr lang="en-US" altLang="ko-KR" sz="3200" dirty="0"/>
+              <a:t>,</a:t>
+            </a:r>
+            <a:r>
+              <a:rPr lang="ko-KR" altLang="en-US" sz="3200" dirty="0"/>
+              <a:t> </a:t>
+            </a:r>
+            <a:r>
+              <a:rPr lang="ko-KR" altLang="en-US" sz="3200" dirty="0" err="1"/>
+              <a:t>그리디</a:t>
+            </a:r>
+            <a:r>
+              <a:rPr lang="en-US" altLang="ko-KR" sz="3200" dirty="0"/>
+              <a:t>)</a:t>
+            </a:r>
+            <a:br>
+              <a:rPr lang="en-US" altLang="ko-KR" sz="3200" dirty="0"/>
+            </a:br>
+            <a:r>
+              <a:rPr lang="en-US" altLang="ko-KR" sz="3200" dirty="0"/>
+              <a:t>https://www.acmicpc.net/problem/14469</a:t>
+            </a:r>
+            <a:endParaRPr lang="ko-KR" altLang="en-US" sz="3200" dirty="0"/>
+          </a:p>
+        </p:txBody>
+      </p:sp>
+      <p:sp>
+        <p:nvSpPr>
+          <p:cNvPr id="3" name="내용 개체 틀 2">
+            <a:extLst>
+              <a:ext uri="{FF2B5EF4-FFF2-40B4-BE49-F238E27FC236}">
+                <a16:creationId xmlns:a16="http://schemas.microsoft.com/office/drawing/2014/main" id="{D05D3B15-6596-9F09-E67D-A230E350F0C0}"/>
+              </a:ext>
+            </a:extLst>
+          </p:cNvPr>
+          <p:cNvSpPr>
+            <a:spLocks noGrp="1"/>
+          </p:cNvSpPr>
+          <p:nvPr>
+            <p:ph idx="1"/>
+          </p:nvPr>
+        </p:nvSpPr>
+        <p:spPr>
+          <a:xfrm>
+            <a:off x="457200" y="1340768"/>
+            <a:ext cx="8229600" cy="4785395"/>
+          </a:xfrm>
+        </p:spPr>
+        <p:txBody>
+          <a:bodyPr/>
+          <a:lstStyle/>
+          <a:p>
+            <a:pPr algn="just"/>
+            <a:r>
+              <a:rPr lang="en-US" altLang="ko-KR" sz="1800" b="1" i="0" dirty="0">
+                <a:effectLst/>
+                <a:latin typeface="Open Sans" panose="020F0502020204030204" pitchFamily="34" charset="0"/>
+              </a:rPr>
+              <a:t>N</a:t>
+            </a:r>
+            <a:r>
+              <a:rPr lang="ko-KR" altLang="en-US" sz="1800" b="1" i="0" dirty="0">
+                <a:effectLst/>
+                <a:latin typeface="Open Sans" panose="020F0502020204030204" pitchFamily="34" charset="0"/>
+              </a:rPr>
+              <a:t>마리의 소가 이 농장에 방문하러 왔다</a:t>
+            </a:r>
+            <a:r>
+              <a:rPr lang="en-US" altLang="ko-KR" sz="1800" b="0" i="0" dirty="0">
+                <a:effectLst/>
+                <a:latin typeface="Open Sans" panose="020F0502020204030204" pitchFamily="34" charset="0"/>
+              </a:rPr>
+              <a:t>. </a:t>
+            </a:r>
+            <a:r>
+              <a:rPr lang="ko-KR" altLang="en-US" sz="1800" b="0" i="0" dirty="0">
+                <a:effectLst/>
+                <a:latin typeface="Open Sans" panose="020F0502020204030204" pitchFamily="34" charset="0"/>
+              </a:rPr>
+              <a:t>소가 도착한 시간과 </a:t>
+            </a:r>
+            <a:r>
+              <a:rPr lang="ko-KR" altLang="en-US" sz="1800" b="0" i="0" dirty="0" err="1">
+                <a:effectLst/>
+                <a:latin typeface="Open Sans" panose="020F0502020204030204" pitchFamily="34" charset="0"/>
+              </a:rPr>
+              <a:t>검문받는</a:t>
+            </a:r>
+            <a:r>
+              <a:rPr lang="ko-KR" altLang="en-US" sz="1800" b="0" i="0" dirty="0">
+                <a:effectLst/>
+                <a:latin typeface="Open Sans" panose="020F0502020204030204" pitchFamily="34" charset="0"/>
+              </a:rPr>
+              <a:t> 데 걸리는 시간은 소마다 다르다</a:t>
+            </a:r>
+            <a:r>
+              <a:rPr lang="en-US" altLang="ko-KR" sz="1800" b="0" i="0" dirty="0">
+                <a:effectLst/>
+                <a:latin typeface="Open Sans" panose="020F0502020204030204" pitchFamily="34" charset="0"/>
+              </a:rPr>
+              <a:t>. (</a:t>
+            </a:r>
+            <a:r>
+              <a:rPr lang="ko-KR" altLang="en-US" sz="1800" b="0" i="0" dirty="0">
+                <a:effectLst/>
+                <a:latin typeface="Open Sans" panose="020F0502020204030204" pitchFamily="34" charset="0"/>
+              </a:rPr>
+              <a:t>물론 같을 수도 있다</a:t>
+            </a:r>
+            <a:r>
+              <a:rPr lang="en-US" altLang="ko-KR" sz="1800" b="0" i="0" dirty="0">
+                <a:effectLst/>
+                <a:latin typeface="Open Sans" panose="020F0502020204030204" pitchFamily="34" charset="0"/>
+              </a:rPr>
+              <a:t>.) </a:t>
+            </a:r>
+            <a:r>
+              <a:rPr lang="ko-KR" altLang="en-US" sz="1800" b="0" i="0" dirty="0">
+                <a:effectLst/>
+                <a:latin typeface="Open Sans" panose="020F0502020204030204" pitchFamily="34" charset="0"/>
+              </a:rPr>
+              <a:t>두 소가 동시에 검문을 받을 수는 없다</a:t>
+            </a:r>
+            <a:r>
+              <a:rPr lang="en-US" altLang="ko-KR" sz="1800" b="0" i="0" dirty="0">
+                <a:effectLst/>
+                <a:latin typeface="Open Sans" panose="020F0502020204030204" pitchFamily="34" charset="0"/>
+              </a:rPr>
+              <a:t>. </a:t>
+            </a:r>
+          </a:p>
+          <a:p>
+            <a:pPr algn="just"/>
+            <a:r>
+              <a:rPr lang="ko-KR" altLang="en-US" sz="1800" b="0" i="0" dirty="0">
+                <a:effectLst/>
+                <a:latin typeface="Open Sans" panose="020F0502020204030204" pitchFamily="34" charset="0"/>
+              </a:rPr>
+              <a:t>예를 들어</a:t>
+            </a:r>
+            <a:r>
+              <a:rPr lang="en-US" altLang="ko-KR" sz="1800" b="0" i="0" dirty="0">
+                <a:effectLst/>
+                <a:latin typeface="Open Sans" panose="020F0502020204030204" pitchFamily="34" charset="0"/>
+              </a:rPr>
+              <a:t>, </a:t>
+            </a:r>
+            <a:r>
+              <a:rPr lang="ko-KR" altLang="en-US" sz="1800" b="1" i="0" dirty="0">
+                <a:effectLst/>
+                <a:latin typeface="Open Sans" panose="020F0502020204030204" pitchFamily="34" charset="0"/>
+              </a:rPr>
+              <a:t>한 소가 </a:t>
+            </a:r>
+            <a:r>
+              <a:rPr lang="en-US" altLang="ko-KR" sz="1800" b="1" i="0" dirty="0">
+                <a:effectLst/>
+                <a:latin typeface="Open Sans" panose="020F0502020204030204" pitchFamily="34" charset="0"/>
+              </a:rPr>
+              <a:t>5</a:t>
+            </a:r>
+            <a:r>
+              <a:rPr lang="ko-KR" altLang="en-US" sz="1800" b="1" i="0" dirty="0">
+                <a:effectLst/>
+                <a:latin typeface="Open Sans" panose="020F0502020204030204" pitchFamily="34" charset="0"/>
+              </a:rPr>
+              <a:t>초에 도착했고 </a:t>
+            </a:r>
+            <a:r>
+              <a:rPr lang="en-US" altLang="ko-KR" sz="1800" b="1" i="0" dirty="0">
+                <a:effectLst/>
+                <a:latin typeface="Open Sans" panose="020F0502020204030204" pitchFamily="34" charset="0"/>
+              </a:rPr>
+              <a:t>7</a:t>
+            </a:r>
+            <a:r>
+              <a:rPr lang="ko-KR" altLang="en-US" sz="1800" b="1" i="0" dirty="0">
+                <a:effectLst/>
+                <a:latin typeface="Open Sans" panose="020F0502020204030204" pitchFamily="34" charset="0"/>
+              </a:rPr>
+              <a:t>초 동안 검문을 받으면</a:t>
+            </a:r>
+            <a:r>
+              <a:rPr lang="en-US" altLang="ko-KR" sz="1800" b="1" i="0" dirty="0">
+                <a:effectLst/>
+                <a:latin typeface="Open Sans" panose="020F0502020204030204" pitchFamily="34" charset="0"/>
+              </a:rPr>
+              <a:t>, 8</a:t>
+            </a:r>
+            <a:r>
+              <a:rPr lang="ko-KR" altLang="en-US" sz="1800" b="1" i="0" dirty="0">
+                <a:effectLst/>
+                <a:latin typeface="Open Sans" panose="020F0502020204030204" pitchFamily="34" charset="0"/>
+              </a:rPr>
+              <a:t>초에 도착한 그 다음 소는 </a:t>
+            </a:r>
+            <a:r>
+              <a:rPr lang="en-US" altLang="ko-KR" sz="1800" b="1" i="0" dirty="0">
+                <a:effectLst/>
+                <a:latin typeface="Open Sans" panose="020F0502020204030204" pitchFamily="34" charset="0"/>
+              </a:rPr>
+              <a:t>12</a:t>
+            </a:r>
+            <a:r>
+              <a:rPr lang="ko-KR" altLang="en-US" sz="1800" b="1" i="0" dirty="0">
+                <a:effectLst/>
+                <a:latin typeface="Open Sans" panose="020F0502020204030204" pitchFamily="34" charset="0"/>
+              </a:rPr>
+              <a:t>초까지 줄을 서야 검문을 받을 수 있다</a:t>
+            </a:r>
+            <a:r>
+              <a:rPr lang="en-US" altLang="ko-KR" sz="1800" b="1" i="0" dirty="0">
+                <a:effectLst/>
+                <a:latin typeface="Open Sans" panose="020F0502020204030204" pitchFamily="34" charset="0"/>
+              </a:rPr>
+              <a:t>.</a:t>
+            </a:r>
+          </a:p>
+          <a:p>
+            <a:pPr algn="just"/>
+            <a:endParaRPr lang="en-US" altLang="ko-KR" sz="1800" b="0" i="0" dirty="0">
+              <a:effectLst/>
+              <a:latin typeface="Open Sans" panose="020F0502020204030204" pitchFamily="34" charset="0"/>
+            </a:endParaRPr>
+          </a:p>
+          <a:p>
+            <a:pPr algn="just"/>
+            <a:r>
+              <a:rPr lang="ko-KR" altLang="en-US" sz="1800" b="0" i="0" dirty="0">
+                <a:effectLst/>
+                <a:latin typeface="Open Sans" panose="020F0502020204030204" pitchFamily="34" charset="0"/>
+              </a:rPr>
+              <a:t>첫 줄에 </a:t>
+            </a:r>
+            <a:r>
+              <a:rPr lang="en-US" altLang="ko-KR" sz="1800" b="0" i="0" dirty="0">
+                <a:effectLst/>
+                <a:latin typeface="Open Sans" panose="020F0502020204030204" pitchFamily="34" charset="0"/>
+              </a:rPr>
+              <a:t>100 </a:t>
+            </a:r>
+            <a:r>
+              <a:rPr lang="ko-KR" altLang="en-US" sz="1800" b="0" i="0" dirty="0">
+                <a:effectLst/>
+                <a:latin typeface="Open Sans" panose="020F0502020204030204" pitchFamily="34" charset="0"/>
+              </a:rPr>
+              <a:t>이하의 양의 정수 </a:t>
+            </a:r>
+            <a:r>
+              <a:rPr lang="en-US" altLang="ko-KR" sz="1800" b="0" i="0" dirty="0">
+                <a:effectLst/>
+                <a:latin typeface="Open Sans" panose="020F0502020204030204" pitchFamily="34" charset="0"/>
+              </a:rPr>
+              <a:t>N</a:t>
+            </a:r>
+            <a:r>
+              <a:rPr lang="ko-KR" altLang="en-US" sz="1800" b="0" i="0" dirty="0">
+                <a:effectLst/>
+                <a:latin typeface="Open Sans" panose="020F0502020204030204" pitchFamily="34" charset="0"/>
+              </a:rPr>
+              <a:t>이 주어진다</a:t>
+            </a:r>
+            <a:r>
+              <a:rPr lang="en-US" altLang="ko-KR" sz="1800" b="0" i="0" dirty="0">
+                <a:effectLst/>
+                <a:latin typeface="Open Sans" panose="020F0502020204030204" pitchFamily="34" charset="0"/>
+              </a:rPr>
+              <a:t>. </a:t>
+            </a:r>
+            <a:r>
+              <a:rPr lang="ko-KR" altLang="en-US" sz="1800" b="0" i="0" dirty="0">
+                <a:effectLst/>
+                <a:latin typeface="Open Sans" panose="020F0502020204030204" pitchFamily="34" charset="0"/>
+              </a:rPr>
+              <a:t>다음 </a:t>
+            </a:r>
+            <a:r>
+              <a:rPr lang="en-US" altLang="ko-KR" sz="1800" b="0" i="0" dirty="0">
+                <a:effectLst/>
+                <a:latin typeface="Open Sans" panose="020F0502020204030204" pitchFamily="34" charset="0"/>
+              </a:rPr>
+              <a:t>N</a:t>
+            </a:r>
+            <a:r>
+              <a:rPr lang="ko-KR" altLang="en-US" sz="1800" b="0" i="0" dirty="0">
+                <a:effectLst/>
+                <a:latin typeface="Open Sans" panose="020F0502020204030204" pitchFamily="34" charset="0"/>
+              </a:rPr>
+              <a:t>줄에는 한 줄에 하나씩 소의 도착 시각과 검문 시간이 주어진다</a:t>
+            </a:r>
+            <a:r>
+              <a:rPr lang="en-US" altLang="ko-KR" sz="1800" b="0" i="0" dirty="0">
+                <a:effectLst/>
+                <a:latin typeface="Open Sans" panose="020F0502020204030204" pitchFamily="34" charset="0"/>
+              </a:rPr>
+              <a:t>. </a:t>
+            </a:r>
+          </a:p>
+          <a:p>
+            <a:pPr algn="just"/>
+            <a:r>
+              <a:rPr lang="ko-KR" altLang="en-US" sz="1800" dirty="0"/>
+              <a:t>모든 소가 농장에 입장하는 데 걸리는 최소 시간을 출력한다</a:t>
+            </a:r>
+            <a:r>
+              <a:rPr lang="en-US" altLang="ko-KR" sz="1800" dirty="0"/>
+              <a:t>.</a:t>
+            </a:r>
+            <a:endParaRPr lang="ko-KR" altLang="en-US" sz="1800" dirty="0"/>
+          </a:p>
+        </p:txBody>
+      </p:sp>
+      <p:sp>
+        <p:nvSpPr>
+          <p:cNvPr id="5" name="슬라이드 번호 개체 틀 4">
+            <a:extLst>
+              <a:ext uri="{FF2B5EF4-FFF2-40B4-BE49-F238E27FC236}">
+                <a16:creationId xmlns:a16="http://schemas.microsoft.com/office/drawing/2014/main" id="{F17EB0AF-2000-8613-E7E2-8699A333FF3D}"/>
+              </a:ext>
+            </a:extLst>
+          </p:cNvPr>
+          <p:cNvSpPr>
+            <a:spLocks noGrp="1"/>
+          </p:cNvSpPr>
+          <p:nvPr>
+            <p:ph type="sldNum" sz="quarter" idx="12"/>
+          </p:nvPr>
+        </p:nvSpPr>
+        <p:spPr/>
+        <p:txBody>
+          <a:bodyPr/>
+          <a:lstStyle/>
+          <a:p>
+            <a:pPr>
+              <a:defRPr/>
+            </a:pPr>
+            <a:fld id="{A268DA64-E15D-4814-A1DA-86D92D550423}" type="slidenum">
+              <a:rPr lang="ko-KR" altLang="en-US" smtClean="0"/>
+              <a:pPr>
+                <a:defRPr/>
+              </a:pPr>
+              <a:t>12</a:t>
+            </a:fld>
+            <a:endParaRPr lang="ko-KR" altLang="en-US"/>
+          </a:p>
+        </p:txBody>
+      </p:sp>
+      <p:pic>
+        <p:nvPicPr>
+          <p:cNvPr id="6" name="그림 5">
+            <a:extLst>
+              <a:ext uri="{FF2B5EF4-FFF2-40B4-BE49-F238E27FC236}">
+                <a16:creationId xmlns:a16="http://schemas.microsoft.com/office/drawing/2014/main" id="{B60C5E06-5E46-EFC8-BB9C-F45A8CD5C242}"/>
+              </a:ext>
+            </a:extLst>
+          </p:cNvPr>
+          <p:cNvPicPr>
+            <a:picLocks noChangeAspect="1"/>
+          </p:cNvPicPr>
+          <p:nvPr/>
+        </p:nvPicPr>
+        <p:blipFill>
+          <a:blip r:embed="rId3"/>
+          <a:stretch>
+            <a:fillRect/>
+          </a:stretch>
+        </p:blipFill>
+        <p:spPr>
+          <a:xfrm>
+            <a:off x="1403648" y="4162611"/>
+            <a:ext cx="6516216" cy="2193739"/>
+          </a:xfrm>
+          <a:prstGeom prst="rect">
+            <a:avLst/>
+          </a:prstGeom>
+        </p:spPr>
+      </p:pic>
+    </p:spTree>
+    <p:extLst>
+      <p:ext uri="{BB962C8B-B14F-4D97-AF65-F5344CB8AC3E}">
+        <p14:creationId xmlns:p14="http://schemas.microsoft.com/office/powerpoint/2010/main" val="1278240668"/>
+      </p:ext>
+    </p:extLst>
+  </p:cSld>
+  <p:clrMapOvr>
+    <a:masterClrMapping/>
+  </p:clrMapOvr>
+</p:sld>
+</file>
+
+<file path=ppt/slides/slide13.xml><?xml version="1.0" encoding="utf-8"?>
+<p:sld xmlns:a="http://schemas.openxmlformats.org/drawingml/2006/main" xmlns:r="http://schemas.openxmlformats.org/officeDocument/2006/relationships" xmlns:p="http://schemas.openxmlformats.org/presentationml/2006/main">
+  <p:cSld>
+    <p:spTree>
+      <p:nvGrpSpPr>
+        <p:cNvPr id="1" name=""/>
+        <p:cNvGrpSpPr/>
+        <p:nvPr/>
+      </p:nvGrpSpPr>
+      <p:grpSpPr>
+        <a:xfrm>
+          <a:off x="0" y="0"/>
+          <a:ext cx="0" cy="0"/>
+          <a:chOff x="0" y="0"/>
+          <a:chExt cx="0" cy="0"/>
+        </a:xfrm>
+      </p:grpSpPr>
+      <p:sp>
+        <p:nvSpPr>
+          <p:cNvPr id="2" name="제목 1">
+            <a:extLst>
+              <a:ext uri="{FF2B5EF4-FFF2-40B4-BE49-F238E27FC236}">
+                <a16:creationId xmlns:a16="http://schemas.microsoft.com/office/drawing/2014/main" id="{DD66D525-2C11-19BE-2F73-924EE623E992}"/>
+              </a:ext>
+            </a:extLst>
+          </p:cNvPr>
+          <p:cNvSpPr>
+            <a:spLocks noGrp="1"/>
+          </p:cNvSpPr>
+          <p:nvPr>
+            <p:ph type="title"/>
+          </p:nvPr>
+        </p:nvSpPr>
+        <p:spPr/>
+        <p:txBody>
+          <a:bodyPr/>
+          <a:lstStyle/>
+          <a:p>
+            <a:r>
+              <a:rPr lang="en-US" altLang="ko-KR" dirty="0"/>
+              <a:t>5. </a:t>
+            </a:r>
+            <a:r>
+              <a:rPr lang="ko-KR" altLang="en-US" dirty="0"/>
+              <a:t>소가 길을 건너간 이유 </a:t>
+            </a:r>
+            <a:r>
+              <a:rPr lang="en-US" altLang="ko-KR" dirty="0"/>
+              <a:t>3</a:t>
+            </a:r>
+            <a:endParaRPr lang="ko-KR" altLang="en-US" dirty="0"/>
+          </a:p>
+        </p:txBody>
+      </p:sp>
+      <p:pic>
+        <p:nvPicPr>
+          <p:cNvPr id="7" name="내용 개체 틀 6">
+            <a:extLst>
+              <a:ext uri="{FF2B5EF4-FFF2-40B4-BE49-F238E27FC236}">
+                <a16:creationId xmlns:a16="http://schemas.microsoft.com/office/drawing/2014/main" id="{4C10B289-4563-7181-F8A6-3E024737A539}"/>
+              </a:ext>
+            </a:extLst>
+          </p:cNvPr>
+          <p:cNvPicPr>
+            <a:picLocks noGrp="1" noChangeAspect="1"/>
+          </p:cNvPicPr>
+          <p:nvPr>
+            <p:ph idx="1"/>
+          </p:nvPr>
+        </p:nvPicPr>
+        <p:blipFill>
+          <a:blip r:embed="rId2"/>
+          <a:stretch>
+            <a:fillRect/>
+          </a:stretch>
+        </p:blipFill>
+        <p:spPr bwMode="auto">
+          <a:xfrm>
+            <a:off x="457200" y="1268760"/>
+            <a:ext cx="8229600" cy="1115789"/>
+          </a:xfrm>
+          <a:prstGeom prst="rect">
+            <a:avLst/>
+          </a:prstGeom>
+          <a:noFill/>
+          <a:ln>
+            <a:noFill/>
+          </a:ln>
+          <a:extLst>
+            <a:ext uri="{909E8E84-426E-40DD-AFC4-6F175D3DCCD1}">
+              <a14:hiddenFill xmlns:a14="http://schemas.microsoft.com/office/drawing/2010/main">
+                <a:solidFill>
+                  <a:srgbClr val="FFFFFF"/>
+                </a:solidFill>
+              </a14:hiddenFill>
+            </a:ext>
+            <a:ext uri="{91240B29-F687-4F45-9708-019B960494DF}">
+              <a14:hiddenLine xmlns:a14="http://schemas.microsoft.com/office/drawing/2010/main" w="9525">
+                <a:solidFill>
+                  <a:srgbClr val="000000"/>
+                </a:solidFill>
+                <a:miter lim="800000"/>
+                <a:headEnd/>
+                <a:tailEnd/>
+              </a14:hiddenLine>
+            </a:ext>
+          </a:extLst>
+        </p:spPr>
+      </p:pic>
+      <p:sp>
+        <p:nvSpPr>
+          <p:cNvPr id="4" name="날짜 개체 틀 3">
+            <a:extLst>
+              <a:ext uri="{FF2B5EF4-FFF2-40B4-BE49-F238E27FC236}">
+                <a16:creationId xmlns:a16="http://schemas.microsoft.com/office/drawing/2014/main" id="{0D620F67-42E9-2E9E-991D-6A4B95E5B80C}"/>
+              </a:ext>
+            </a:extLst>
+          </p:cNvPr>
+          <p:cNvSpPr>
+            <a:spLocks noGrp="1"/>
+          </p:cNvSpPr>
+          <p:nvPr>
+            <p:ph type="dt" sz="half" idx="10"/>
+          </p:nvPr>
+        </p:nvSpPr>
+        <p:spPr/>
+        <p:txBody>
+          <a:bodyPr/>
+          <a:lstStyle/>
+          <a:p>
+            <a:pPr>
+              <a:defRPr/>
+            </a:pPr>
+            <a:r>
+              <a:rPr lang="en-US" altLang="ko-KR"/>
+              <a:t>2008</a:t>
+            </a:r>
+            <a:r>
+              <a:rPr lang="ko-KR" altLang="en-US"/>
+              <a:t>년</a:t>
+            </a:r>
+            <a:r>
+              <a:rPr lang="en-US" altLang="ko-KR"/>
+              <a:t>2</a:t>
+            </a:r>
+            <a:r>
+              <a:rPr lang="ko-KR" altLang="en-US"/>
+              <a:t>학기 </a:t>
+            </a:r>
+            <a:r>
+              <a:rPr lang="en-US" altLang="ko-KR"/>
+              <a:t>3D</a:t>
+            </a:r>
+            <a:r>
+              <a:rPr lang="ko-KR" altLang="en-US"/>
+              <a:t>게임프로그래밍</a:t>
+            </a:r>
+            <a:r>
+              <a:rPr lang="en-US" altLang="ko-KR"/>
+              <a:t>II </a:t>
+            </a:r>
+            <a:r>
+              <a:rPr lang="ko-KR" altLang="en-US"/>
+              <a:t>담당교수</a:t>
+            </a:r>
+            <a:r>
+              <a:rPr lang="en-US" altLang="ko-KR"/>
+              <a:t>:</a:t>
+            </a:r>
+            <a:r>
+              <a:rPr lang="ko-KR" altLang="en-US"/>
+              <a:t>김영식</a:t>
+            </a:r>
+          </a:p>
+        </p:txBody>
+      </p:sp>
+      <p:sp>
+        <p:nvSpPr>
+          <p:cNvPr id="5" name="슬라이드 번호 개체 틀 4">
+            <a:extLst>
+              <a:ext uri="{FF2B5EF4-FFF2-40B4-BE49-F238E27FC236}">
+                <a16:creationId xmlns:a16="http://schemas.microsoft.com/office/drawing/2014/main" id="{2372F615-3CB0-4DDD-91FF-C01E7A18EE0B}"/>
+              </a:ext>
+            </a:extLst>
+          </p:cNvPr>
+          <p:cNvSpPr>
+            <a:spLocks noGrp="1"/>
+          </p:cNvSpPr>
+          <p:nvPr>
+            <p:ph type="sldNum" sz="quarter" idx="12"/>
+          </p:nvPr>
+        </p:nvSpPr>
+        <p:spPr/>
+        <p:txBody>
+          <a:bodyPr/>
+          <a:lstStyle/>
+          <a:p>
+            <a:pPr>
+              <a:defRPr/>
+            </a:pPr>
+            <a:fld id="{A268DA64-E15D-4814-A1DA-86D92D550423}" type="slidenum">
+              <a:rPr lang="ko-KR" altLang="en-US" smtClean="0"/>
+              <a:pPr>
+                <a:defRPr/>
+              </a:pPr>
+              <a:t>13</a:t>
+            </a:fld>
+            <a:endParaRPr lang="ko-KR" altLang="en-US"/>
+          </a:p>
+        </p:txBody>
+      </p:sp>
+      <p:pic>
+        <p:nvPicPr>
+          <p:cNvPr id="9" name="그림 8">
+            <a:extLst>
+              <a:ext uri="{FF2B5EF4-FFF2-40B4-BE49-F238E27FC236}">
+                <a16:creationId xmlns:a16="http://schemas.microsoft.com/office/drawing/2014/main" id="{FE6FB4E9-1F09-F2E9-957D-0D22472E9C21}"/>
+              </a:ext>
+            </a:extLst>
+          </p:cNvPr>
+          <p:cNvPicPr>
+            <a:picLocks noChangeAspect="1"/>
+          </p:cNvPicPr>
+          <p:nvPr/>
+        </p:nvPicPr>
+        <p:blipFill>
+          <a:blip r:embed="rId3"/>
+          <a:stretch>
+            <a:fillRect/>
+          </a:stretch>
+        </p:blipFill>
+        <p:spPr>
+          <a:xfrm>
+            <a:off x="2592491" y="2386104"/>
+            <a:ext cx="3148579" cy="3971801"/>
+          </a:xfrm>
+          <a:prstGeom prst="rect">
+            <a:avLst/>
+          </a:prstGeom>
+        </p:spPr>
+      </p:pic>
+    </p:spTree>
+    <p:extLst>
+      <p:ext uri="{BB962C8B-B14F-4D97-AF65-F5344CB8AC3E}">
+        <p14:creationId xmlns:p14="http://schemas.microsoft.com/office/powerpoint/2010/main" val="2821809292"/>
+      </p:ext>
+    </p:extLst>
+  </p:cSld>
+  <p:clrMapOvr>
+    <a:masterClrMapping/>
+  </p:clrMapOvr>
+</p:sld>
+</file>
+
 <file path=ppt/slides/slide2.xml><?xml version="1.0" encoding="utf-8"?>
 <p:sld xmlns:a="http://schemas.openxmlformats.org/drawingml/2006/main" xmlns:r="http://schemas.openxmlformats.org/officeDocument/2006/relationships" xmlns:p="http://schemas.openxmlformats.org/presentationml/2006/main">
   <p:cSld>
@@ -8678,6 +10071,188 @@
   <p:cSld>
     <p:spTree>
       <p:nvGrpSpPr>
+        <p:cNvPr id="1" name=""/>
+        <p:cNvGrpSpPr/>
+        <p:nvPr/>
+      </p:nvGrpSpPr>
+      <p:grpSpPr>
+        <a:xfrm>
+          <a:off x="0" y="0"/>
+          <a:ext cx="0" cy="0"/>
+          <a:chOff x="0" y="0"/>
+          <a:chExt cx="0" cy="0"/>
+        </a:xfrm>
+      </p:grpSpPr>
+      <p:sp>
+        <p:nvSpPr>
+          <p:cNvPr id="2" name="제목 1">
+            <a:extLst>
+              <a:ext uri="{FF2B5EF4-FFF2-40B4-BE49-F238E27FC236}">
+                <a16:creationId xmlns:a16="http://schemas.microsoft.com/office/drawing/2014/main" id="{78941AC4-0081-8261-2046-79EB2D1149FF}"/>
+              </a:ext>
+            </a:extLst>
+          </p:cNvPr>
+          <p:cNvSpPr>
+            <a:spLocks noGrp="1"/>
+          </p:cNvSpPr>
+          <p:nvPr>
+            <p:ph type="title"/>
+          </p:nvPr>
+        </p:nvSpPr>
+        <p:spPr/>
+        <p:txBody>
+          <a:bodyPr/>
+          <a:lstStyle/>
+          <a:p>
+            <a:endParaRPr lang="ko-KR" altLang="en-US"/>
+          </a:p>
+        </p:txBody>
+      </p:sp>
+      <p:sp>
+        <p:nvSpPr>
+          <p:cNvPr id="3" name="내용 개체 틀 2">
+            <a:extLst>
+              <a:ext uri="{FF2B5EF4-FFF2-40B4-BE49-F238E27FC236}">
+                <a16:creationId xmlns:a16="http://schemas.microsoft.com/office/drawing/2014/main" id="{EB28B711-27C7-07BA-99F7-042C4F728C5C}"/>
+              </a:ext>
+            </a:extLst>
+          </p:cNvPr>
+          <p:cNvSpPr>
+            <a:spLocks noGrp="1"/>
+          </p:cNvSpPr>
+          <p:nvPr>
+            <p:ph idx="1"/>
+          </p:nvPr>
+        </p:nvSpPr>
+        <p:spPr/>
+        <p:txBody>
+          <a:bodyPr/>
+          <a:lstStyle/>
+          <a:p>
+            <a:endParaRPr lang="ko-KR" altLang="en-US"/>
+          </a:p>
+        </p:txBody>
+      </p:sp>
+      <p:sp>
+        <p:nvSpPr>
+          <p:cNvPr id="4" name="날짜 개체 틀 3">
+            <a:extLst>
+              <a:ext uri="{FF2B5EF4-FFF2-40B4-BE49-F238E27FC236}">
+                <a16:creationId xmlns:a16="http://schemas.microsoft.com/office/drawing/2014/main" id="{E0553BC0-7345-F107-80DD-43E0D8C267A8}"/>
+              </a:ext>
+            </a:extLst>
+          </p:cNvPr>
+          <p:cNvSpPr>
+            <a:spLocks noGrp="1"/>
+          </p:cNvSpPr>
+          <p:nvPr>
+            <p:ph type="dt" sz="half" idx="10"/>
+          </p:nvPr>
+        </p:nvSpPr>
+        <p:spPr/>
+        <p:txBody>
+          <a:bodyPr/>
+          <a:lstStyle/>
+          <a:p>
+            <a:pPr>
+              <a:defRPr/>
+            </a:pPr>
+            <a:r>
+              <a:rPr lang="en-US" altLang="ko-KR"/>
+              <a:t>2008</a:t>
+            </a:r>
+            <a:r>
+              <a:rPr lang="ko-KR" altLang="en-US"/>
+              <a:t>년</a:t>
+            </a:r>
+            <a:r>
+              <a:rPr lang="en-US" altLang="ko-KR"/>
+              <a:t>2</a:t>
+            </a:r>
+            <a:r>
+              <a:rPr lang="ko-KR" altLang="en-US"/>
+              <a:t>학기 </a:t>
+            </a:r>
+            <a:r>
+              <a:rPr lang="en-US" altLang="ko-KR"/>
+              <a:t>3D</a:t>
+            </a:r>
+            <a:r>
+              <a:rPr lang="ko-KR" altLang="en-US"/>
+              <a:t>게임프로그래밍</a:t>
+            </a:r>
+            <a:r>
+              <a:rPr lang="en-US" altLang="ko-KR"/>
+              <a:t>II </a:t>
+            </a:r>
+            <a:r>
+              <a:rPr lang="ko-KR" altLang="en-US"/>
+              <a:t>담당교수</a:t>
+            </a:r>
+            <a:r>
+              <a:rPr lang="en-US" altLang="ko-KR"/>
+              <a:t>:</a:t>
+            </a:r>
+            <a:r>
+              <a:rPr lang="ko-KR" altLang="en-US"/>
+              <a:t>김영식</a:t>
+            </a:r>
+          </a:p>
+        </p:txBody>
+      </p:sp>
+      <p:sp>
+        <p:nvSpPr>
+          <p:cNvPr id="5" name="슬라이드 번호 개체 틀 4">
+            <a:extLst>
+              <a:ext uri="{FF2B5EF4-FFF2-40B4-BE49-F238E27FC236}">
+                <a16:creationId xmlns:a16="http://schemas.microsoft.com/office/drawing/2014/main" id="{F212D2D5-A90F-B08C-9463-CE36CB1DF29F}"/>
+              </a:ext>
+            </a:extLst>
+          </p:cNvPr>
+          <p:cNvSpPr>
+            <a:spLocks noGrp="1"/>
+          </p:cNvSpPr>
+          <p:nvPr>
+            <p:ph type="sldNum" sz="quarter" idx="12"/>
+          </p:nvPr>
+        </p:nvSpPr>
+        <p:spPr/>
+        <p:txBody>
+          <a:bodyPr/>
+          <a:lstStyle/>
+          <a:p>
+            <a:pPr>
+              <a:defRPr/>
+            </a:pPr>
+            <a:fld id="{A268DA64-E15D-4814-A1DA-86D92D550423}" type="slidenum">
+              <a:rPr lang="ko-KR" altLang="en-US" smtClean="0"/>
+              <a:pPr>
+                <a:defRPr/>
+              </a:pPr>
+              <a:t>6</a:t>
+            </a:fld>
+            <a:endParaRPr lang="ko-KR" altLang="en-US"/>
+          </a:p>
+        </p:txBody>
+      </p:sp>
+    </p:spTree>
+    <p:extLst>
+      <p:ext uri="{BB962C8B-B14F-4D97-AF65-F5344CB8AC3E}">
+        <p14:creationId xmlns:p14="http://schemas.microsoft.com/office/powerpoint/2010/main" val="1835262076"/>
+      </p:ext>
+    </p:extLst>
+  </p:cSld>
+  <p:clrMapOvr>
+    <a:masterClrMapping/>
+  </p:clrMapOvr>
+</p:sld>
+</file>
+
+<file path=ppt/slides/slide7.xml><?xml version="1.0" encoding="utf-8"?>
+<p:sld xmlns:a="http://schemas.openxmlformats.org/drawingml/2006/main" xmlns:r="http://schemas.openxmlformats.org/officeDocument/2006/relationships" xmlns:p="http://schemas.openxmlformats.org/presentationml/2006/main">
+  <p:cSld>
+    <p:spTree>
+      <p:nvGrpSpPr>
         <p:cNvPr id="1" name="">
           <a:extLst>
             <a:ext uri="{FF2B5EF4-FFF2-40B4-BE49-F238E27FC236}">
@@ -8904,7 +10479,7 @@
               <a:pPr>
                 <a:defRPr/>
               </a:pPr>
-              <a:t>6</a:t>
+              <a:t>7</a:t>
             </a:fld>
             <a:endParaRPr lang="ko-KR" altLang="en-US"/>
           </a:p>
@@ -9172,7 +10747,7 @@
 </p:sld>
 </file>
 
-<file path=ppt/slides/slide7.xml><?xml version="1.0" encoding="utf-8"?>
+<file path=ppt/slides/slide8.xml><?xml version="1.0" encoding="utf-8"?>
 <p:sld xmlns:a="http://schemas.openxmlformats.org/drawingml/2006/main" xmlns:r="http://schemas.openxmlformats.org/officeDocument/2006/relationships" xmlns:p="http://schemas.openxmlformats.org/presentationml/2006/main">
   <p:cSld>
     <p:spTree>
@@ -9441,7 +11016,7 @@
               <a:pPr>
                 <a:defRPr/>
               </a:pPr>
-              <a:t>7</a:t>
+              <a:t>8</a:t>
             </a:fld>
             <a:endParaRPr lang="ko-KR" altLang="en-US"/>
           </a:p>
@@ -9490,18 +11065,12 @@
 </p:sld>
 </file>
 
-<file path=ppt/slides/slide8.xml><?xml version="1.0" encoding="utf-8"?>
+<file path=ppt/slides/slide9.xml><?xml version="1.0" encoding="utf-8"?>
 <p:sld xmlns:a="http://schemas.openxmlformats.org/drawingml/2006/main" xmlns:r="http://schemas.openxmlformats.org/officeDocument/2006/relationships" xmlns:p="http://schemas.openxmlformats.org/presentationml/2006/main">
   <p:cSld>
     <p:spTree>
       <p:nvGrpSpPr>
-        <p:cNvPr id="1" name="">
-          <a:extLst>
-            <a:ext uri="{FF2B5EF4-FFF2-40B4-BE49-F238E27FC236}">
-              <a16:creationId xmlns:a16="http://schemas.microsoft.com/office/drawing/2014/main" id="{BB2182D6-7C3A-1450-0957-0736228992F8}"/>
-            </a:ext>
-          </a:extLst>
-        </p:cNvPr>
+        <p:cNvPr id="1" name=""/>
         <p:cNvGrpSpPr/>
         <p:nvPr/>
       </p:nvGrpSpPr>
@@ -9518,7 +11087,7 @@
           <p:cNvPr id="2" name="제목 1">
             <a:extLst>
               <a:ext uri="{FF2B5EF4-FFF2-40B4-BE49-F238E27FC236}">
-                <a16:creationId xmlns:a16="http://schemas.microsoft.com/office/drawing/2014/main" id="{00FC0AAC-B616-D4EC-909C-ECC3F2A8B843}"/>
+                <a16:creationId xmlns:a16="http://schemas.microsoft.com/office/drawing/2014/main" id="{401D9C6A-37C3-482F-0F48-F4EB19D5B8B5}"/>
               </a:ext>
             </a:extLst>
           </p:cNvPr>
@@ -9529,47 +11098,146 @@
             <p:ph type="title"/>
           </p:nvPr>
         </p:nvSpPr>
-        <p:spPr/>
+        <p:spPr>
+          <a:xfrm>
+            <a:off x="457200" y="274638"/>
+            <a:ext cx="8229600" cy="365125"/>
+          </a:xfrm>
+        </p:spPr>
         <p:txBody>
           <a:bodyPr/>
           <a:lstStyle/>
           <a:p>
             <a:r>
-              <a:rPr lang="en-US" altLang="ko-KR" sz="2800" dirty="0"/>
-              <a:t>4. </a:t>
-            </a:r>
-            <a:r>
-              <a:rPr lang="ko-KR" altLang="en-US" sz="2800" dirty="0"/>
-              <a:t>실패율 </a:t>
-            </a:r>
-            <a:r>
-              <a:rPr lang="en-US" altLang="ko-KR" sz="2800" dirty="0"/>
-              <a:t>(Programmers, </a:t>
-            </a:r>
-            <a:r>
-              <a:rPr lang="ko-KR" altLang="en-US" sz="2800" dirty="0"/>
-              <a:t>구현</a:t>
-            </a:r>
-            <a:r>
-              <a:rPr lang="en-US" altLang="ko-KR" sz="2800" dirty="0"/>
-              <a:t>, </a:t>
-            </a:r>
-            <a:r>
-              <a:rPr lang="ko-KR" altLang="en-US" sz="2800" dirty="0"/>
-              <a:t>정렬</a:t>
-            </a:r>
-            <a:r>
-              <a:rPr lang="en-US" altLang="ko-KR" sz="2800" dirty="0"/>
-              <a:t>) </a:t>
-            </a:r>
-            <a:br>
-              <a:rPr lang="en-US" altLang="ko-KR" sz="2800" dirty="0"/>
-            </a:br>
-            <a:r>
-              <a:rPr lang="en-US" altLang="ko-KR" sz="2000" dirty="0"/>
-              <a:t>https://school.programmers.co.kr/learn/courses/30/lessons/42889</a:t>
-            </a:r>
-            <a:endParaRPr lang="ko-KR" altLang="en-US" sz="2000" dirty="0"/>
+              <a:rPr lang="en-US" altLang="ko-KR" dirty="0"/>
+              <a:t>3. </a:t>
+            </a:r>
+            <a:r>
+              <a:rPr lang="ko-KR" altLang="en-US" dirty="0"/>
+              <a:t>행렬 게임</a:t>
+            </a:r>
+          </a:p>
+        </p:txBody>
+      </p:sp>
+      <p:pic>
+        <p:nvPicPr>
+          <p:cNvPr id="7" name="내용 개체 틀 6">
+            <a:extLst>
+              <a:ext uri="{FF2B5EF4-FFF2-40B4-BE49-F238E27FC236}">
+                <a16:creationId xmlns:a16="http://schemas.microsoft.com/office/drawing/2014/main" id="{A62A86BF-2571-BD67-5C49-902E5F1BB101}"/>
+              </a:ext>
+            </a:extLst>
+          </p:cNvPr>
+          <p:cNvPicPr>
+            <a:picLocks noGrp="1" noChangeAspect="1"/>
+          </p:cNvPicPr>
+          <p:nvPr>
+            <p:ph idx="1"/>
+          </p:nvPr>
+        </p:nvPicPr>
+        <p:blipFill>
+          <a:blip r:embed="rId2"/>
+          <a:stretch>
+            <a:fillRect/>
+          </a:stretch>
+        </p:blipFill>
+        <p:spPr bwMode="auto">
+          <a:xfrm>
+            <a:off x="395536" y="1844824"/>
+            <a:ext cx="2072073" cy="3500264"/>
+          </a:xfrm>
+          <a:prstGeom prst="rect">
+            <a:avLst/>
+          </a:prstGeom>
+          <a:noFill/>
+          <a:ln>
+            <a:noFill/>
+          </a:ln>
+          <a:extLst>
+            <a:ext uri="{909E8E84-426E-40DD-AFC4-6F175D3DCCD1}">
+              <a14:hiddenFill xmlns:a14="http://schemas.microsoft.com/office/drawing/2010/main">
+                <a:solidFill>
+                  <a:srgbClr val="FFFFFF"/>
+                </a:solidFill>
+              </a14:hiddenFill>
+            </a:ext>
+            <a:ext uri="{91240B29-F687-4F45-9708-019B960494DF}">
+              <a14:hiddenLine xmlns:a14="http://schemas.microsoft.com/office/drawing/2010/main" w="9525">
+                <a:solidFill>
+                  <a:srgbClr val="000000"/>
+                </a:solidFill>
+                <a:miter lim="800000"/>
+                <a:headEnd/>
+                <a:tailEnd/>
+              </a14:hiddenLine>
+            </a:ext>
+          </a:extLst>
+        </p:spPr>
+      </p:pic>
+      <p:sp>
+        <p:nvSpPr>
+          <p:cNvPr id="4" name="날짜 개체 틀 3">
+            <a:extLst>
+              <a:ext uri="{FF2B5EF4-FFF2-40B4-BE49-F238E27FC236}">
+                <a16:creationId xmlns:a16="http://schemas.microsoft.com/office/drawing/2014/main" id="{20047E73-2794-A6A3-8D50-5D10A45EB62A}"/>
+              </a:ext>
+            </a:extLst>
+          </p:cNvPr>
+          <p:cNvSpPr>
+            <a:spLocks noGrp="1"/>
+          </p:cNvSpPr>
+          <p:nvPr>
+            <p:ph type="dt" sz="half" idx="10"/>
+          </p:nvPr>
+        </p:nvSpPr>
+        <p:spPr/>
+        <p:txBody>
+          <a:bodyPr/>
+          <a:lstStyle/>
+          <a:p>
+            <a:pPr>
+              <a:defRPr/>
+            </a:pPr>
+            <a:r>
+              <a:rPr lang="en-US" altLang="ko-KR"/>
+              <a:t>2008</a:t>
+            </a:r>
+            <a:r>
+              <a:rPr lang="ko-KR" altLang="en-US"/>
+              <a:t>년</a:t>
+            </a:r>
+            <a:r>
+              <a:rPr lang="en-US" altLang="ko-KR"/>
+              <a:t>2</a:t>
+            </a:r>
+            <a:r>
+              <a:rPr lang="ko-KR" altLang="en-US"/>
+              <a:t>학기 </a:t>
+            </a:r>
+            <a:r>
+              <a:rPr lang="en-US" altLang="ko-KR"/>
+              <a:t>3D</a:t>
+            </a:r>
+            <a:r>
+              <a:rPr lang="ko-KR" altLang="en-US"/>
+              <a:t>게임프로그래밍</a:t>
+            </a:r>
+            <a:r>
+              <a:rPr lang="en-US" altLang="ko-KR"/>
+              <a:t>II </a:t>
+            </a:r>
+            <a:r>
+              <a:rPr lang="ko-KR" altLang="en-US"/>
+              <a:t>담당교수</a:t>
+            </a:r>
+            <a:r>
+              <a:rPr lang="en-US" altLang="ko-KR"/>
+              <a:t>:</a:t>
+            </a:r>
+            <a:r>
+              <a:rPr lang="ko-KR" altLang="en-US"/>
+              <a:t>김영식</a:t>
+            </a:r>
           </a:p>
         </p:txBody>
       </p:sp>
@@ -9578,7 +11246,7 @@
           <p:cNvPr id="5" name="슬라이드 번호 개체 틀 4">
             <a:extLst>
               <a:ext uri="{FF2B5EF4-FFF2-40B4-BE49-F238E27FC236}">
-                <a16:creationId xmlns:a16="http://schemas.microsoft.com/office/drawing/2014/main" id="{81099AAD-C6EA-CB4B-F77E-8434C7D5EADC}"/>
+                <a16:creationId xmlns:a16="http://schemas.microsoft.com/office/drawing/2014/main" id="{52026ECD-1974-DA6D-5592-C2921DC88920}"/>
               </a:ext>
             </a:extLst>
           </p:cNvPr>
@@ -9602,219 +11270,9 @@
               <a:pPr>
                 <a:defRPr/>
               </a:pPr>
-              <a:t>8</a:t>
+              <a:t>9</a:t>
             </a:fld>
             <a:endParaRPr lang="ko-KR" altLang="en-US"/>
-          </a:p>
-        </p:txBody>
-      </p:sp>
-      <p:sp>
-        <p:nvSpPr>
-          <p:cNvPr id="3" name="내용 개체 틀 2">
-            <a:extLst>
-              <a:ext uri="{FF2B5EF4-FFF2-40B4-BE49-F238E27FC236}">
-                <a16:creationId xmlns:a16="http://schemas.microsoft.com/office/drawing/2014/main" id="{858C86E8-5349-F7B3-AFB6-B10A83FC024F}"/>
-              </a:ext>
-            </a:extLst>
-          </p:cNvPr>
-          <p:cNvSpPr>
-            <a:spLocks noGrp="1"/>
-          </p:cNvSpPr>
-          <p:nvPr>
-            <p:ph idx="1"/>
-          </p:nvPr>
-        </p:nvSpPr>
-        <p:spPr>
-          <a:xfrm>
-            <a:off x="457200" y="1340768"/>
-            <a:ext cx="8229600" cy="4785395"/>
-          </a:xfrm>
-        </p:spPr>
-        <p:txBody>
-          <a:bodyPr/>
-          <a:lstStyle/>
-          <a:p>
-            <a:pPr algn="just"/>
-            <a:r>
-              <a:rPr lang="ko-KR" altLang="en-US" sz="1800" b="0" i="0" dirty="0">
-                <a:effectLst/>
-                <a:latin typeface="Open Sans" panose="020F0502020204030204" pitchFamily="34" charset="0"/>
-              </a:rPr>
-              <a:t>실패율</a:t>
-            </a:r>
-            <a:r>
-              <a:rPr lang="en-US" altLang="ko-KR" sz="1800" dirty="0">
-                <a:latin typeface="Open Sans" panose="020F0502020204030204" pitchFamily="34" charset="0"/>
-              </a:rPr>
-              <a:t> = </a:t>
-            </a:r>
-            <a:r>
-              <a:rPr lang="ko-KR" altLang="en-US" sz="1800" b="0" i="0" dirty="0">
-                <a:effectLst/>
-                <a:latin typeface="Open Sans" panose="020F0502020204030204" pitchFamily="34" charset="0"/>
-              </a:rPr>
-              <a:t>스테이지에 도달했으나 아직 클리어하지 못한 플레이어의 수 </a:t>
-            </a:r>
-            <a:r>
-              <a:rPr lang="en-US" altLang="ko-KR" sz="1800" b="0" i="0" dirty="0">
-                <a:effectLst/>
-                <a:latin typeface="Open Sans" panose="020F0502020204030204" pitchFamily="34" charset="0"/>
-              </a:rPr>
-              <a:t>/ </a:t>
-            </a:r>
-            <a:r>
-              <a:rPr lang="ko-KR" altLang="en-US" sz="1800" b="0" i="0" dirty="0">
-                <a:effectLst/>
-                <a:latin typeface="Open Sans" panose="020F0502020204030204" pitchFamily="34" charset="0"/>
-              </a:rPr>
-              <a:t>스테이지에 도달한 플레이어 수</a:t>
-            </a:r>
-          </a:p>
-          <a:p>
-            <a:pPr algn="just"/>
-            <a:r>
-              <a:rPr lang="ko-KR" altLang="en-US" sz="1800" b="0" i="0" dirty="0">
-                <a:effectLst/>
-                <a:latin typeface="Open Sans" panose="020F0502020204030204" pitchFamily="34" charset="0"/>
-              </a:rPr>
-              <a:t>전체 스테이지의 개수 </a:t>
-            </a:r>
-            <a:r>
-              <a:rPr lang="en-US" altLang="ko-KR" sz="1800" b="0" i="0" dirty="0">
-                <a:effectLst/>
-                <a:latin typeface="Open Sans" panose="020F0502020204030204" pitchFamily="34" charset="0"/>
-              </a:rPr>
-              <a:t>N, </a:t>
-            </a:r>
-            <a:r>
-              <a:rPr lang="ko-KR" altLang="en-US" sz="1800" b="0" i="0" dirty="0">
-                <a:effectLst/>
-                <a:latin typeface="Open Sans" panose="020F0502020204030204" pitchFamily="34" charset="0"/>
-              </a:rPr>
-              <a:t>게임을 이용하는 사용자가 현재 </a:t>
-            </a:r>
-            <a:r>
-              <a:rPr lang="ko-KR" altLang="en-US" sz="1800" b="0" i="0" dirty="0" err="1">
-                <a:effectLst/>
-                <a:latin typeface="Open Sans" panose="020F0502020204030204" pitchFamily="34" charset="0"/>
-              </a:rPr>
-              <a:t>멈춰있는</a:t>
-            </a:r>
-            <a:r>
-              <a:rPr lang="ko-KR" altLang="en-US" sz="1800" b="0" i="0" dirty="0">
-                <a:effectLst/>
-                <a:latin typeface="Open Sans" panose="020F0502020204030204" pitchFamily="34" charset="0"/>
-              </a:rPr>
-              <a:t> 스테이지의 번호가 담긴 배열 </a:t>
-            </a:r>
-            <a:r>
-              <a:rPr lang="en-US" altLang="ko-KR" sz="1800" b="0" i="0" dirty="0">
-                <a:effectLst/>
-                <a:latin typeface="Open Sans" panose="020F0502020204030204" pitchFamily="34" charset="0"/>
-              </a:rPr>
-              <a:t>stages</a:t>
-            </a:r>
-            <a:r>
-              <a:rPr lang="ko-KR" altLang="en-US" sz="1800" b="0" i="0" dirty="0">
-                <a:effectLst/>
-                <a:latin typeface="Open Sans" panose="020F0502020204030204" pitchFamily="34" charset="0"/>
-              </a:rPr>
-              <a:t>가 매개변수로 주어질 때</a:t>
-            </a:r>
-            <a:r>
-              <a:rPr lang="en-US" altLang="ko-KR" sz="1800" b="0" i="0" dirty="0">
-                <a:effectLst/>
-                <a:latin typeface="Open Sans" panose="020F0502020204030204" pitchFamily="34" charset="0"/>
-              </a:rPr>
-              <a:t>, </a:t>
-            </a:r>
-            <a:r>
-              <a:rPr lang="ko-KR" altLang="en-US" sz="1800" b="0" i="0" dirty="0">
-                <a:effectLst/>
-                <a:latin typeface="Open Sans" panose="020F0502020204030204" pitchFamily="34" charset="0"/>
-              </a:rPr>
-              <a:t>실패율이 높은 스테이지부터 내림차순으로 스테이지의 번호가 담겨있는 배열을 </a:t>
-            </a:r>
-            <a:r>
-              <a:rPr lang="en-US" altLang="ko-KR" sz="1800" b="0" i="0" dirty="0">
-                <a:effectLst/>
-                <a:latin typeface="Open Sans" panose="020F0502020204030204" pitchFamily="34" charset="0"/>
-              </a:rPr>
-              <a:t>return </a:t>
-            </a:r>
-            <a:r>
-              <a:rPr lang="ko-KR" altLang="en-US" sz="1800" b="0" i="0" dirty="0">
-                <a:effectLst/>
-                <a:latin typeface="Open Sans" panose="020F0502020204030204" pitchFamily="34" charset="0"/>
-              </a:rPr>
-              <a:t>하도록 </a:t>
-            </a:r>
-            <a:r>
-              <a:rPr lang="en-US" altLang="ko-KR" sz="1800" b="0" i="0" dirty="0">
-                <a:effectLst/>
-                <a:latin typeface="Open Sans" panose="020F0502020204030204" pitchFamily="34" charset="0"/>
-              </a:rPr>
-              <a:t>solution </a:t>
-            </a:r>
-            <a:r>
-              <a:rPr lang="ko-KR" altLang="en-US" sz="1800" b="0" i="0" dirty="0">
-                <a:effectLst/>
-                <a:latin typeface="Open Sans" panose="020F0502020204030204" pitchFamily="34" charset="0"/>
-              </a:rPr>
-              <a:t>함수를 완성하라</a:t>
-            </a:r>
-            <a:r>
-              <a:rPr lang="en-US" altLang="ko-KR" sz="1800" b="0" i="0" dirty="0">
-                <a:effectLst/>
-                <a:latin typeface="Open Sans" panose="020F0502020204030204" pitchFamily="34" charset="0"/>
-              </a:rPr>
-              <a:t>.</a:t>
-            </a:r>
-          </a:p>
-          <a:p>
-            <a:pPr algn="just"/>
-            <a:r>
-              <a:rPr lang="ko-KR" altLang="en-US" sz="1800" b="0" i="0" dirty="0">
-                <a:effectLst/>
-                <a:latin typeface="Open Sans" panose="020F0502020204030204" pitchFamily="34" charset="0"/>
-              </a:rPr>
-              <a:t>실패율이 같다면 작은 번호의 스테이지가 먼저 오도록 한다</a:t>
-            </a:r>
-            <a:r>
-              <a:rPr lang="en-US" altLang="ko-KR" sz="1800" b="0" i="0" dirty="0">
-                <a:effectLst/>
-                <a:latin typeface="Open Sans" panose="020F0502020204030204" pitchFamily="34" charset="0"/>
-              </a:rPr>
-              <a:t>.</a:t>
-            </a:r>
-          </a:p>
-          <a:p>
-            <a:pPr algn="just"/>
-            <a:r>
-              <a:rPr lang="ko-KR" altLang="en-US" sz="1800" b="0" i="0" dirty="0">
-                <a:effectLst/>
-                <a:latin typeface="Open Sans" panose="020F0502020204030204" pitchFamily="34" charset="0"/>
-              </a:rPr>
-              <a:t>스테이지에 도달한 유저가 없는 경우 해당 스테이지의 실패율은 </a:t>
-            </a:r>
-            <a:r>
-              <a:rPr lang="en-US" altLang="ko-KR" sz="1800" b="0" i="0" dirty="0">
-                <a:effectLst/>
-                <a:latin typeface="Open Sans" panose="020F0502020204030204" pitchFamily="34" charset="0"/>
-              </a:rPr>
-              <a:t>0.</a:t>
-            </a:r>
-          </a:p>
-          <a:p>
-            <a:pPr algn="just"/>
-            <a:endParaRPr lang="en-US" altLang="ko-KR" sz="1800" b="0" i="0" dirty="0">
-              <a:effectLst/>
-              <a:latin typeface="Open Sans" panose="020F0502020204030204" pitchFamily="34" charset="0"/>
-            </a:endParaRPr>
-          </a:p>
-          <a:p>
-            <a:pPr algn="just"/>
-            <a:endParaRPr lang="ko-KR" altLang="en-US" sz="1800" dirty="0"/>
           </a:p>
         </p:txBody>
       </p:sp>
@@ -9823,7 +11281,7 @@
           <p:cNvPr id="9" name="그림 8">
             <a:extLst>
               <a:ext uri="{FF2B5EF4-FFF2-40B4-BE49-F238E27FC236}">
-                <a16:creationId xmlns:a16="http://schemas.microsoft.com/office/drawing/2014/main" id="{79D5A20B-B007-FA87-3006-68BB93188A38}"/>
+                <a16:creationId xmlns:a16="http://schemas.microsoft.com/office/drawing/2014/main" id="{1BD20336-7B6D-175E-157F-10030412981D}"/>
               </a:ext>
             </a:extLst>
           </p:cNvPr>
@@ -9840,8 +11298,38 @@
         </p:blipFill>
         <p:spPr>
           <a:xfrm>
-            <a:off x="1907704" y="3938841"/>
-            <a:ext cx="4905375" cy="2152650"/>
+            <a:off x="2411760" y="1778789"/>
+            <a:ext cx="3087748" cy="3632334"/>
+          </a:xfrm>
+          <a:prstGeom prst="rect">
+            <a:avLst/>
+          </a:prstGeom>
+        </p:spPr>
+      </p:pic>
+      <p:pic>
+        <p:nvPicPr>
+          <p:cNvPr id="11" name="그림 10">
+            <a:extLst>
+              <a:ext uri="{FF2B5EF4-FFF2-40B4-BE49-F238E27FC236}">
+                <a16:creationId xmlns:a16="http://schemas.microsoft.com/office/drawing/2014/main" id="{ADEA49EC-F1E3-4608-44F7-DCAD733B8E15}"/>
+              </a:ext>
+            </a:extLst>
+          </p:cNvPr>
+          <p:cNvPicPr>
+            <a:picLocks noChangeAspect="1"/>
+          </p:cNvPicPr>
+          <p:nvPr/>
+        </p:nvPicPr>
+        <p:blipFill>
+          <a:blip r:embed="rId4"/>
+          <a:stretch>
+            <a:fillRect/>
+          </a:stretch>
+        </p:blipFill>
+        <p:spPr>
+          <a:xfrm>
+            <a:off x="4033698" y="3355916"/>
+            <a:ext cx="4561740" cy="1685214"/>
           </a:xfrm>
           <a:prstGeom prst="rect">
             <a:avLst/>
@@ -9851,471 +11339,7 @@
     </p:spTree>
     <p:extLst>
       <p:ext uri="{BB962C8B-B14F-4D97-AF65-F5344CB8AC3E}">
-        <p14:creationId xmlns:p14="http://schemas.microsoft.com/office/powerpoint/2010/main" val="2988214561"/>
-      </p:ext>
-    </p:extLst>
-  </p:cSld>
-  <p:clrMapOvr>
-    <a:masterClrMapping/>
-  </p:clrMapOvr>
-</p:sld>
-</file>
-
-<file path=ppt/slides/slide9.xml><?xml version="1.0" encoding="utf-8"?>
-<p:sld xmlns:a="http://schemas.openxmlformats.org/drawingml/2006/main" xmlns:r="http://schemas.openxmlformats.org/officeDocument/2006/relationships" xmlns:p="http://schemas.openxmlformats.org/presentationml/2006/main">
-  <p:cSld>
-    <p:spTree>
-      <p:nvGrpSpPr>
-        <p:cNvPr id="1" name="">
-          <a:extLst>
-            <a:ext uri="{FF2B5EF4-FFF2-40B4-BE49-F238E27FC236}">
-              <a16:creationId xmlns:a16="http://schemas.microsoft.com/office/drawing/2014/main" id="{E6F2C708-8D69-B68B-A8D2-413FA3ED7192}"/>
-            </a:ext>
-          </a:extLst>
-        </p:cNvPr>
-        <p:cNvGrpSpPr/>
-        <p:nvPr/>
-      </p:nvGrpSpPr>
-      <p:grpSpPr>
-        <a:xfrm>
-          <a:off x="0" y="0"/>
-          <a:ext cx="0" cy="0"/>
-          <a:chOff x="0" y="0"/>
-          <a:chExt cx="0" cy="0"/>
-        </a:xfrm>
-      </p:grpSpPr>
-      <p:sp>
-        <p:nvSpPr>
-          <p:cNvPr id="2" name="제목 1">
-            <a:extLst>
-              <a:ext uri="{FF2B5EF4-FFF2-40B4-BE49-F238E27FC236}">
-                <a16:creationId xmlns:a16="http://schemas.microsoft.com/office/drawing/2014/main" id="{CE06BCCD-376D-CD69-322E-655C046A9A4A}"/>
-              </a:ext>
-            </a:extLst>
-          </p:cNvPr>
-          <p:cNvSpPr>
-            <a:spLocks noGrp="1"/>
-          </p:cNvSpPr>
-          <p:nvPr>
-            <p:ph type="title"/>
-          </p:nvPr>
-        </p:nvSpPr>
-        <p:spPr>
-          <a:xfrm>
-            <a:off x="107504" y="274638"/>
-            <a:ext cx="8856984" cy="868346"/>
-          </a:xfrm>
-        </p:spPr>
-        <p:txBody>
-          <a:bodyPr/>
-          <a:lstStyle/>
-          <a:p>
-            <a:r>
-              <a:rPr lang="en-US" altLang="ko-KR" sz="3200" dirty="0"/>
-              <a:t>5. </a:t>
-            </a:r>
-            <a:r>
-              <a:rPr lang="ko-KR" altLang="en-US" sz="3200" dirty="0"/>
-              <a:t>소가 길을 건너간 이유 </a:t>
-            </a:r>
-            <a:r>
-              <a:rPr lang="en-US" altLang="ko-KR" sz="3200" dirty="0"/>
-              <a:t>3(</a:t>
-            </a:r>
-            <a:r>
-              <a:rPr lang="ko-KR" altLang="en-US" sz="3200" dirty="0"/>
-              <a:t>백준</a:t>
-            </a:r>
-            <a:r>
-              <a:rPr lang="en-US" altLang="ko-KR" sz="3200" dirty="0"/>
-              <a:t>, </a:t>
-            </a:r>
-            <a:r>
-              <a:rPr lang="ko-KR" altLang="en-US" sz="3200" dirty="0"/>
-              <a:t>정렬</a:t>
-            </a:r>
-            <a:r>
-              <a:rPr lang="en-US" altLang="ko-KR" sz="3200" dirty="0"/>
-              <a:t>,</a:t>
-            </a:r>
-            <a:r>
-              <a:rPr lang="ko-KR" altLang="en-US" sz="3200" dirty="0"/>
-              <a:t> </a:t>
-            </a:r>
-            <a:r>
-              <a:rPr lang="ko-KR" altLang="en-US" sz="3200" dirty="0" err="1"/>
-              <a:t>그리디</a:t>
-            </a:r>
-            <a:r>
-              <a:rPr lang="en-US" altLang="ko-KR" sz="3200" dirty="0"/>
-              <a:t>)</a:t>
-            </a:r>
-            <a:br>
-              <a:rPr lang="en-US" altLang="ko-KR" sz="3200" dirty="0"/>
-            </a:br>
-            <a:r>
-              <a:rPr lang="en-US" altLang="ko-KR" sz="3200" dirty="0"/>
-              <a:t>https://www.acmicpc.net/problem/14469</a:t>
-            </a:r>
-            <a:endParaRPr lang="ko-KR" altLang="en-US" sz="3200" dirty="0"/>
-          </a:p>
-        </p:txBody>
-      </p:sp>
-      <p:sp>
-        <p:nvSpPr>
-          <p:cNvPr id="3" name="내용 개체 틀 2">
-            <a:extLst>
-              <a:ext uri="{FF2B5EF4-FFF2-40B4-BE49-F238E27FC236}">
-                <a16:creationId xmlns:a16="http://schemas.microsoft.com/office/drawing/2014/main" id="{D05D3B15-6596-9F09-E67D-A230E350F0C0}"/>
-              </a:ext>
-            </a:extLst>
-          </p:cNvPr>
-          <p:cNvSpPr>
-            <a:spLocks noGrp="1"/>
-          </p:cNvSpPr>
-          <p:nvPr>
-            <p:ph idx="1"/>
-          </p:nvPr>
-        </p:nvSpPr>
-        <p:spPr>
-          <a:xfrm>
-            <a:off x="457200" y="1340768"/>
-            <a:ext cx="8229600" cy="4785395"/>
-          </a:xfrm>
-        </p:spPr>
-        <p:txBody>
-          <a:bodyPr/>
-          <a:lstStyle/>
-          <a:p>
-            <a:pPr algn="just"/>
-            <a:r>
-              <a:rPr lang="en-US" altLang="ko-KR" sz="1800" b="1" i="0" dirty="0">
-                <a:effectLst/>
-                <a:latin typeface="Open Sans" panose="020F0502020204030204" pitchFamily="34" charset="0"/>
-              </a:rPr>
-              <a:t>N</a:t>
-            </a:r>
-            <a:r>
-              <a:rPr lang="ko-KR" altLang="en-US" sz="1800" b="1" i="0" dirty="0">
-                <a:effectLst/>
-                <a:latin typeface="Open Sans" panose="020F0502020204030204" pitchFamily="34" charset="0"/>
-              </a:rPr>
-              <a:t>마리의 소가 이 농장에 방문하러 왔다</a:t>
-            </a:r>
-            <a:r>
-              <a:rPr lang="en-US" altLang="ko-KR" sz="1800" b="0" i="0" dirty="0">
-                <a:effectLst/>
-                <a:latin typeface="Open Sans" panose="020F0502020204030204" pitchFamily="34" charset="0"/>
-              </a:rPr>
-              <a:t>. </a:t>
-            </a:r>
-            <a:r>
-              <a:rPr lang="ko-KR" altLang="en-US" sz="1800" b="0" i="0" dirty="0">
-                <a:effectLst/>
-                <a:latin typeface="Open Sans" panose="020F0502020204030204" pitchFamily="34" charset="0"/>
-              </a:rPr>
-              <a:t>소가 도착한 시간과 </a:t>
-            </a:r>
-            <a:r>
-              <a:rPr lang="ko-KR" altLang="en-US" sz="1800" b="0" i="0" dirty="0" err="1">
-                <a:effectLst/>
-                <a:latin typeface="Open Sans" panose="020F0502020204030204" pitchFamily="34" charset="0"/>
-              </a:rPr>
-              <a:t>검문받는</a:t>
-            </a:r>
-            <a:r>
-              <a:rPr lang="ko-KR" altLang="en-US" sz="1800" b="0" i="0" dirty="0">
-                <a:effectLst/>
-                <a:latin typeface="Open Sans" panose="020F0502020204030204" pitchFamily="34" charset="0"/>
-              </a:rPr>
-              <a:t> 데 걸리는 시간은 소마다 다르다</a:t>
-            </a:r>
-            <a:r>
-              <a:rPr lang="en-US" altLang="ko-KR" sz="1800" b="0" i="0" dirty="0">
-                <a:effectLst/>
-                <a:latin typeface="Open Sans" panose="020F0502020204030204" pitchFamily="34" charset="0"/>
-              </a:rPr>
-              <a:t>. (</a:t>
-            </a:r>
-            <a:r>
-              <a:rPr lang="ko-KR" altLang="en-US" sz="1800" b="0" i="0" dirty="0">
-                <a:effectLst/>
-                <a:latin typeface="Open Sans" panose="020F0502020204030204" pitchFamily="34" charset="0"/>
-              </a:rPr>
-              <a:t>물론 같을 수도 있다</a:t>
-            </a:r>
-            <a:r>
-              <a:rPr lang="en-US" altLang="ko-KR" sz="1800" b="0" i="0" dirty="0">
-                <a:effectLst/>
-                <a:latin typeface="Open Sans" panose="020F0502020204030204" pitchFamily="34" charset="0"/>
-              </a:rPr>
-              <a:t>.) </a:t>
-            </a:r>
-            <a:r>
-              <a:rPr lang="ko-KR" altLang="en-US" sz="1800" b="0" i="0" dirty="0">
-                <a:effectLst/>
-                <a:latin typeface="Open Sans" panose="020F0502020204030204" pitchFamily="34" charset="0"/>
-              </a:rPr>
-              <a:t>두 소가 동시에 검문을 받을 수는 없다</a:t>
-            </a:r>
-            <a:r>
-              <a:rPr lang="en-US" altLang="ko-KR" sz="1800" b="0" i="0" dirty="0">
-                <a:effectLst/>
-                <a:latin typeface="Open Sans" panose="020F0502020204030204" pitchFamily="34" charset="0"/>
-              </a:rPr>
-              <a:t>. </a:t>
-            </a:r>
-          </a:p>
-          <a:p>
-            <a:pPr algn="just"/>
-            <a:r>
-              <a:rPr lang="ko-KR" altLang="en-US" sz="1800" b="0" i="0" dirty="0">
-                <a:effectLst/>
-                <a:latin typeface="Open Sans" panose="020F0502020204030204" pitchFamily="34" charset="0"/>
-              </a:rPr>
-              <a:t>예를 들어</a:t>
-            </a:r>
-            <a:r>
-              <a:rPr lang="en-US" altLang="ko-KR" sz="1800" b="0" i="0" dirty="0">
-                <a:effectLst/>
-                <a:latin typeface="Open Sans" panose="020F0502020204030204" pitchFamily="34" charset="0"/>
-              </a:rPr>
-              <a:t>, </a:t>
-            </a:r>
-            <a:r>
-              <a:rPr lang="ko-KR" altLang="en-US" sz="1800" b="1" i="0" dirty="0">
-                <a:effectLst/>
-                <a:latin typeface="Open Sans" panose="020F0502020204030204" pitchFamily="34" charset="0"/>
-              </a:rPr>
-              <a:t>한 소가 </a:t>
-            </a:r>
-            <a:r>
-              <a:rPr lang="en-US" altLang="ko-KR" sz="1800" b="1" i="0" dirty="0">
-                <a:effectLst/>
-                <a:latin typeface="Open Sans" panose="020F0502020204030204" pitchFamily="34" charset="0"/>
-              </a:rPr>
-              <a:t>5</a:t>
-            </a:r>
-            <a:r>
-              <a:rPr lang="ko-KR" altLang="en-US" sz="1800" b="1" i="0" dirty="0">
-                <a:effectLst/>
-                <a:latin typeface="Open Sans" panose="020F0502020204030204" pitchFamily="34" charset="0"/>
-              </a:rPr>
-              <a:t>초에 도착했고 </a:t>
-            </a:r>
-            <a:r>
-              <a:rPr lang="en-US" altLang="ko-KR" sz="1800" b="1" i="0" dirty="0">
-                <a:effectLst/>
-                <a:latin typeface="Open Sans" panose="020F0502020204030204" pitchFamily="34" charset="0"/>
-              </a:rPr>
-              <a:t>7</a:t>
-            </a:r>
-            <a:r>
-              <a:rPr lang="ko-KR" altLang="en-US" sz="1800" b="1" i="0" dirty="0">
-                <a:effectLst/>
-                <a:latin typeface="Open Sans" panose="020F0502020204030204" pitchFamily="34" charset="0"/>
-              </a:rPr>
-              <a:t>초 동안 검문을 받으면</a:t>
-            </a:r>
-            <a:r>
-              <a:rPr lang="en-US" altLang="ko-KR" sz="1800" b="1" i="0" dirty="0">
-                <a:effectLst/>
-                <a:latin typeface="Open Sans" panose="020F0502020204030204" pitchFamily="34" charset="0"/>
-              </a:rPr>
-              <a:t>, 8</a:t>
-            </a:r>
-            <a:r>
-              <a:rPr lang="ko-KR" altLang="en-US" sz="1800" b="1" i="0" dirty="0">
-                <a:effectLst/>
-                <a:latin typeface="Open Sans" panose="020F0502020204030204" pitchFamily="34" charset="0"/>
-              </a:rPr>
-              <a:t>초에 도착한 그 다음 소는 </a:t>
-            </a:r>
-            <a:r>
-              <a:rPr lang="en-US" altLang="ko-KR" sz="1800" b="1" i="0" dirty="0">
-                <a:effectLst/>
-                <a:latin typeface="Open Sans" panose="020F0502020204030204" pitchFamily="34" charset="0"/>
-              </a:rPr>
-              <a:t>12</a:t>
-            </a:r>
-            <a:r>
-              <a:rPr lang="ko-KR" altLang="en-US" sz="1800" b="1" i="0" dirty="0">
-                <a:effectLst/>
-                <a:latin typeface="Open Sans" panose="020F0502020204030204" pitchFamily="34" charset="0"/>
-              </a:rPr>
-              <a:t>초까지 줄을 서야 검문을 받을 수 있다</a:t>
-            </a:r>
-            <a:r>
-              <a:rPr lang="en-US" altLang="ko-KR" sz="1800" b="1" i="0" dirty="0">
-                <a:effectLst/>
-                <a:latin typeface="Open Sans" panose="020F0502020204030204" pitchFamily="34" charset="0"/>
-              </a:rPr>
-              <a:t>.</a:t>
-            </a:r>
-          </a:p>
-          <a:p>
-            <a:pPr algn="just"/>
-            <a:endParaRPr lang="en-US" altLang="ko-KR" sz="1800" b="0" i="0" dirty="0">
-              <a:effectLst/>
-              <a:latin typeface="Open Sans" panose="020F0502020204030204" pitchFamily="34" charset="0"/>
-            </a:endParaRPr>
-          </a:p>
-          <a:p>
-            <a:pPr algn="just"/>
-            <a:r>
-              <a:rPr lang="ko-KR" altLang="en-US" sz="1800" b="0" i="0" dirty="0">
-                <a:effectLst/>
-                <a:latin typeface="Open Sans" panose="020F0502020204030204" pitchFamily="34" charset="0"/>
-              </a:rPr>
-              <a:t>첫 줄에 </a:t>
-            </a:r>
-            <a:r>
-              <a:rPr lang="en-US" altLang="ko-KR" sz="1800" b="0" i="0" dirty="0">
-                <a:effectLst/>
-                <a:latin typeface="Open Sans" panose="020F0502020204030204" pitchFamily="34" charset="0"/>
-              </a:rPr>
-              <a:t>100 </a:t>
-            </a:r>
-            <a:r>
-              <a:rPr lang="ko-KR" altLang="en-US" sz="1800" b="0" i="0" dirty="0">
-                <a:effectLst/>
-                <a:latin typeface="Open Sans" panose="020F0502020204030204" pitchFamily="34" charset="0"/>
-              </a:rPr>
-              <a:t>이하의 양의 정수 </a:t>
-            </a:r>
-            <a:r>
-              <a:rPr lang="en-US" altLang="ko-KR" sz="1800" b="0" i="0" dirty="0">
-                <a:effectLst/>
-                <a:latin typeface="Open Sans" panose="020F0502020204030204" pitchFamily="34" charset="0"/>
-              </a:rPr>
-              <a:t>N</a:t>
-            </a:r>
-            <a:r>
-              <a:rPr lang="ko-KR" altLang="en-US" sz="1800" b="0" i="0" dirty="0">
-                <a:effectLst/>
-                <a:latin typeface="Open Sans" panose="020F0502020204030204" pitchFamily="34" charset="0"/>
-              </a:rPr>
-              <a:t>이 주어진다</a:t>
-            </a:r>
-            <a:r>
-              <a:rPr lang="en-US" altLang="ko-KR" sz="1800" b="0" i="0" dirty="0">
-                <a:effectLst/>
-                <a:latin typeface="Open Sans" panose="020F0502020204030204" pitchFamily="34" charset="0"/>
-              </a:rPr>
-              <a:t>. </a:t>
-            </a:r>
-            <a:r>
-              <a:rPr lang="ko-KR" altLang="en-US" sz="1800" b="0" i="0" dirty="0">
-                <a:effectLst/>
-                <a:latin typeface="Open Sans" panose="020F0502020204030204" pitchFamily="34" charset="0"/>
-              </a:rPr>
-              <a:t>다음 </a:t>
-            </a:r>
-            <a:r>
-              <a:rPr lang="en-US" altLang="ko-KR" sz="1800" b="0" i="0" dirty="0">
-                <a:effectLst/>
-                <a:latin typeface="Open Sans" panose="020F0502020204030204" pitchFamily="34" charset="0"/>
-              </a:rPr>
-              <a:t>N</a:t>
-            </a:r>
-            <a:r>
-              <a:rPr lang="ko-KR" altLang="en-US" sz="1800" b="0" i="0" dirty="0">
-                <a:effectLst/>
-                <a:latin typeface="Open Sans" panose="020F0502020204030204" pitchFamily="34" charset="0"/>
-              </a:rPr>
-              <a:t>줄에는 한 줄에 하나씩 소의 도착 시각과 검문 시간이 주어진다</a:t>
-            </a:r>
-            <a:r>
-              <a:rPr lang="en-US" altLang="ko-KR" sz="1800" b="0" i="0" dirty="0">
-                <a:effectLst/>
-                <a:latin typeface="Open Sans" panose="020F0502020204030204" pitchFamily="34" charset="0"/>
-              </a:rPr>
-              <a:t>. </a:t>
-            </a:r>
-          </a:p>
-          <a:p>
-            <a:pPr algn="just"/>
-            <a:r>
-              <a:rPr lang="ko-KR" altLang="en-US" sz="1800" dirty="0"/>
-              <a:t>모든 소가 농장에 입장하는 데 걸리는 최소 시간을 출력한다</a:t>
-            </a:r>
-            <a:r>
-              <a:rPr lang="en-US" altLang="ko-KR" sz="1800" dirty="0"/>
-              <a:t>.</a:t>
-            </a:r>
-            <a:endParaRPr lang="ko-KR" altLang="en-US" sz="1800" dirty="0"/>
-          </a:p>
-        </p:txBody>
-      </p:sp>
-      <p:sp>
-        <p:nvSpPr>
-          <p:cNvPr id="5" name="슬라이드 번호 개체 틀 4">
-            <a:extLst>
-              <a:ext uri="{FF2B5EF4-FFF2-40B4-BE49-F238E27FC236}">
-                <a16:creationId xmlns:a16="http://schemas.microsoft.com/office/drawing/2014/main" id="{F17EB0AF-2000-8613-E7E2-8699A333FF3D}"/>
-              </a:ext>
-            </a:extLst>
-          </p:cNvPr>
-          <p:cNvSpPr>
-            <a:spLocks noGrp="1"/>
-          </p:cNvSpPr>
-          <p:nvPr>
-            <p:ph type="sldNum" sz="quarter" idx="12"/>
-          </p:nvPr>
-        </p:nvSpPr>
-        <p:spPr/>
-        <p:txBody>
-          <a:bodyPr/>
-          <a:lstStyle/>
-          <a:p>
-            <a:pPr>
-              <a:defRPr/>
-            </a:pPr>
-            <a:fld id="{A268DA64-E15D-4814-A1DA-86D92D550423}" type="slidenum">
-              <a:rPr lang="ko-KR" altLang="en-US" smtClean="0"/>
-              <a:pPr>
-                <a:defRPr/>
-              </a:pPr>
-              <a:t>9</a:t>
-            </a:fld>
-            <a:endParaRPr lang="ko-KR" altLang="en-US"/>
-          </a:p>
-        </p:txBody>
-      </p:sp>
-      <p:pic>
-        <p:nvPicPr>
-          <p:cNvPr id="6" name="그림 5">
-            <a:extLst>
-              <a:ext uri="{FF2B5EF4-FFF2-40B4-BE49-F238E27FC236}">
-                <a16:creationId xmlns:a16="http://schemas.microsoft.com/office/drawing/2014/main" id="{B60C5E06-5E46-EFC8-BB9C-F45A8CD5C242}"/>
-              </a:ext>
-            </a:extLst>
-          </p:cNvPr>
-          <p:cNvPicPr>
-            <a:picLocks noChangeAspect="1"/>
-          </p:cNvPicPr>
-          <p:nvPr/>
-        </p:nvPicPr>
-        <p:blipFill>
-          <a:blip r:embed="rId3"/>
-          <a:stretch>
-            <a:fillRect/>
-          </a:stretch>
-        </p:blipFill>
-        <p:spPr>
-          <a:xfrm>
-            <a:off x="1403648" y="4162611"/>
-            <a:ext cx="6516216" cy="2193739"/>
-          </a:xfrm>
-          <a:prstGeom prst="rect">
-            <a:avLst/>
-          </a:prstGeom>
-        </p:spPr>
-      </p:pic>
-    </p:spTree>
-    <p:extLst>
-      <p:ext uri="{BB962C8B-B14F-4D97-AF65-F5344CB8AC3E}">
-        <p14:creationId xmlns:p14="http://schemas.microsoft.com/office/powerpoint/2010/main" val="1278240668"/>
+        <p14:creationId xmlns:p14="http://schemas.microsoft.com/office/powerpoint/2010/main" val="1460563361"/>
       </p:ext>
     </p:extLst>
   </p:cSld>
